--- a/Lecture slides/AMOS B06 - Agile Coaching.pptx
+++ b/Lecture slides/AMOS B06 - Agile Coaching.pptx
@@ -2,34 +2,35 @@
 <file path=ppt/presentation.xml><?xml version="1.0" encoding="utf-8"?>
 <p:presentation xmlns:a="http://schemas.openxmlformats.org/drawingml/2006/main" xmlns:r="http://schemas.openxmlformats.org/officeDocument/2006/relationships" xmlns:mc="http://schemas.openxmlformats.org/markup-compatibility/2006" xmlns:mv="urn:schemas-microsoft-com:mac:vml" xmlns:p="http://schemas.openxmlformats.org/presentationml/2006/main" xmlns:c="http://schemas.openxmlformats.org/drawingml/2006/chart" xmlns:dgm="http://schemas.openxmlformats.org/drawingml/2006/diagram" xmlns:o="urn:schemas-microsoft-com:office:office" xmlns:v="urn:schemas-microsoft-com:vml" xmlns:pvml="urn:schemas-microsoft-com:office:powerpoint" xmlns:com="http://schemas.openxmlformats.org/drawingml/2006/compatibility" xmlns:p14="http://schemas.microsoft.com/office/powerpoint/2010/main" xmlns:p15="http://schemas.microsoft.com/office/powerpoint/2012/main" xmlns:ahyp="http://schemas.microsoft.com/office/drawing/2018/hyperlinkcolor" autoCompressPictures="0" strictFirstAndLastChars="0" saveSubsetFonts="1" showSpecialPlsOnTitleSld="0">
   <p:sldMasterIdLst>
-    <p:sldMasterId id="2147483654" r:id="rId4"/>
+    <p:sldMasterId id="2147483660" r:id="rId4"/>
+    <p:sldMasterId id="2147483661" r:id="rId5"/>
   </p:sldMasterIdLst>
   <p:notesMasterIdLst>
-    <p:notesMasterId r:id="rId5"/>
+    <p:notesMasterId r:id="rId6"/>
   </p:notesMasterIdLst>
   <p:sldIdLst>
-    <p:sldId id="256" r:id="rId6"/>
-    <p:sldId id="257" r:id="rId7"/>
-    <p:sldId id="258" r:id="rId8"/>
-    <p:sldId id="259" r:id="rId9"/>
-    <p:sldId id="260" r:id="rId10"/>
-    <p:sldId id="261" r:id="rId11"/>
-    <p:sldId id="262" r:id="rId12"/>
-    <p:sldId id="263" r:id="rId13"/>
-    <p:sldId id="264" r:id="rId14"/>
-    <p:sldId id="265" r:id="rId15"/>
-    <p:sldId id="266" r:id="rId16"/>
-    <p:sldId id="267" r:id="rId17"/>
-    <p:sldId id="268" r:id="rId18"/>
-    <p:sldId id="269" r:id="rId19"/>
-    <p:sldId id="270" r:id="rId20"/>
-    <p:sldId id="271" r:id="rId21"/>
-    <p:sldId id="272" r:id="rId22"/>
-    <p:sldId id="273" r:id="rId23"/>
-    <p:sldId id="274" r:id="rId24"/>
-    <p:sldId id="275" r:id="rId25"/>
-    <p:sldId id="276" r:id="rId26"/>
-    <p:sldId id="277" r:id="rId27"/>
+    <p:sldId id="256" r:id="rId7"/>
+    <p:sldId id="257" r:id="rId8"/>
+    <p:sldId id="258" r:id="rId9"/>
+    <p:sldId id="259" r:id="rId10"/>
+    <p:sldId id="260" r:id="rId11"/>
+    <p:sldId id="261" r:id="rId12"/>
+    <p:sldId id="262" r:id="rId13"/>
+    <p:sldId id="263" r:id="rId14"/>
+    <p:sldId id="264" r:id="rId15"/>
+    <p:sldId id="265" r:id="rId16"/>
+    <p:sldId id="266" r:id="rId17"/>
+    <p:sldId id="267" r:id="rId18"/>
+    <p:sldId id="268" r:id="rId19"/>
+    <p:sldId id="269" r:id="rId20"/>
+    <p:sldId id="270" r:id="rId21"/>
+    <p:sldId id="271" r:id="rId22"/>
+    <p:sldId id="272" r:id="rId23"/>
+    <p:sldId id="273" r:id="rId24"/>
+    <p:sldId id="274" r:id="rId25"/>
+    <p:sldId id="275" r:id="rId26"/>
+    <p:sldId id="276" r:id="rId27"/>
+    <p:sldId id="277" r:id="rId28"/>
   </p:sldIdLst>
   <p:sldSz cy="5143500" cx="9144000"/>
   <p:notesSz cx="6858000" cy="9144000"/>
@@ -712,7 +713,7 @@
   <p:cSld>
     <p:spTree>
       <p:nvGrpSpPr>
-        <p:cNvPr id="47" name="Shape 47"/>
+        <p:cNvPr id="89" name="Shape 89"/>
         <p:cNvGrpSpPr/>
         <p:nvPr/>
       </p:nvGrpSpPr>
@@ -726,7 +727,7 @@
       </p:grpSpPr>
       <p:sp>
         <p:nvSpPr>
-          <p:cNvPr id="48" name="Google Shape;48;g2cd8f994aab_0_122:notes"/>
+          <p:cNvPr id="90" name="Google Shape;90;g2cd8f994aab_0_122:notes"/>
           <p:cNvSpPr/>
           <p:nvPr>
             <p:ph idx="2" type="sldImg"/>
@@ -761,7 +762,7 @@
       </p:sp>
       <p:sp>
         <p:nvSpPr>
-          <p:cNvPr id="49" name="Google Shape;49;g2cd8f994aab_0_122:notes"/>
+          <p:cNvPr id="91" name="Google Shape;91;g2cd8f994aab_0_122:notes"/>
           <p:cNvSpPr txBox="1"/>
           <p:nvPr>
             <p:ph idx="1" type="body"/>
@@ -811,7 +812,7 @@
   <p:cSld>
     <p:spTree>
       <p:nvGrpSpPr>
-        <p:cNvPr id="106" name="Shape 106"/>
+        <p:cNvPr id="148" name="Shape 148"/>
         <p:cNvGrpSpPr/>
         <p:nvPr/>
       </p:nvGrpSpPr>
@@ -825,7 +826,7 @@
       </p:grpSpPr>
       <p:sp>
         <p:nvSpPr>
-          <p:cNvPr id="107" name="Google Shape;107;g22e4025cc2c_0_81:notes"/>
+          <p:cNvPr id="149" name="Google Shape;149;g22e4025cc2c_0_81:notes"/>
           <p:cNvSpPr/>
           <p:nvPr>
             <p:ph idx="2" type="sldImg"/>
@@ -860,7 +861,7 @@
       </p:sp>
       <p:sp>
         <p:nvSpPr>
-          <p:cNvPr id="108" name="Google Shape;108;g22e4025cc2c_0_81:notes"/>
+          <p:cNvPr id="150" name="Google Shape;150;g22e4025cc2c_0_81:notes"/>
           <p:cNvSpPr txBox="1"/>
           <p:nvPr>
             <p:ph idx="1" type="body"/>
@@ -910,7 +911,7 @@
   <p:cSld>
     <p:spTree>
       <p:nvGrpSpPr>
-        <p:cNvPr id="113" name="Shape 113"/>
+        <p:cNvPr id="155" name="Shape 155"/>
         <p:cNvGrpSpPr/>
         <p:nvPr/>
       </p:nvGrpSpPr>
@@ -924,7 +925,7 @@
       </p:grpSpPr>
       <p:sp>
         <p:nvSpPr>
-          <p:cNvPr id="114" name="Google Shape;114;g22e4025cc2c_0_0:notes"/>
+          <p:cNvPr id="156" name="Google Shape;156;g22e4025cc2c_0_0:notes"/>
           <p:cNvSpPr/>
           <p:nvPr>
             <p:ph idx="2" type="sldImg"/>
@@ -959,7 +960,7 @@
       </p:sp>
       <p:sp>
         <p:nvSpPr>
-          <p:cNvPr id="115" name="Google Shape;115;g22e4025cc2c_0_0:notes"/>
+          <p:cNvPr id="157" name="Google Shape;157;g22e4025cc2c_0_0:notes"/>
           <p:cNvSpPr txBox="1"/>
           <p:nvPr>
             <p:ph idx="1" type="body"/>
@@ -1009,7 +1010,7 @@
   <p:cSld>
     <p:spTree>
       <p:nvGrpSpPr>
-        <p:cNvPr id="120" name="Shape 120"/>
+        <p:cNvPr id="162" name="Shape 162"/>
         <p:cNvGrpSpPr/>
         <p:nvPr/>
       </p:nvGrpSpPr>
@@ -1023,7 +1024,7 @@
       </p:grpSpPr>
       <p:sp>
         <p:nvSpPr>
-          <p:cNvPr id="121" name="Google Shape;121;g22e4025cc2c_0_18:notes"/>
+          <p:cNvPr id="163" name="Google Shape;163;g22e4025cc2c_0_18:notes"/>
           <p:cNvSpPr/>
           <p:nvPr>
             <p:ph idx="2" type="sldImg"/>
@@ -1058,7 +1059,7 @@
       </p:sp>
       <p:sp>
         <p:nvSpPr>
-          <p:cNvPr id="122" name="Google Shape;122;g22e4025cc2c_0_18:notes"/>
+          <p:cNvPr id="164" name="Google Shape;164;g22e4025cc2c_0_18:notes"/>
           <p:cNvSpPr txBox="1"/>
           <p:nvPr>
             <p:ph idx="1" type="body"/>
@@ -1108,7 +1109,7 @@
   <p:cSld>
     <p:spTree>
       <p:nvGrpSpPr>
-        <p:cNvPr id="125" name="Shape 125"/>
+        <p:cNvPr id="167" name="Shape 167"/>
         <p:cNvGrpSpPr/>
         <p:nvPr/>
       </p:nvGrpSpPr>
@@ -1122,7 +1123,7 @@
       </p:grpSpPr>
       <p:sp>
         <p:nvSpPr>
-          <p:cNvPr id="126" name="Google Shape;126;g22e4025cc2c_0_30:notes"/>
+          <p:cNvPr id="168" name="Google Shape;168;g22e4025cc2c_0_30:notes"/>
           <p:cNvSpPr/>
           <p:nvPr>
             <p:ph idx="2" type="sldImg"/>
@@ -1157,7 +1158,7 @@
       </p:sp>
       <p:sp>
         <p:nvSpPr>
-          <p:cNvPr id="127" name="Google Shape;127;g22e4025cc2c_0_30:notes"/>
+          <p:cNvPr id="169" name="Google Shape;169;g22e4025cc2c_0_30:notes"/>
           <p:cNvSpPr txBox="1"/>
           <p:nvPr>
             <p:ph idx="1" type="body"/>
@@ -1207,7 +1208,7 @@
   <p:cSld>
     <p:spTree>
       <p:nvGrpSpPr>
-        <p:cNvPr id="132" name="Shape 132"/>
+        <p:cNvPr id="174" name="Shape 174"/>
         <p:cNvGrpSpPr/>
         <p:nvPr/>
       </p:nvGrpSpPr>
@@ -1221,7 +1222,7 @@
       </p:grpSpPr>
       <p:sp>
         <p:nvSpPr>
-          <p:cNvPr id="133" name="Google Shape;133;g22e4025cc2c_0_22:notes"/>
+          <p:cNvPr id="175" name="Google Shape;175;g22e4025cc2c_0_22:notes"/>
           <p:cNvSpPr/>
           <p:nvPr>
             <p:ph idx="2" type="sldImg"/>
@@ -1256,7 +1257,7 @@
       </p:sp>
       <p:sp>
         <p:nvSpPr>
-          <p:cNvPr id="134" name="Google Shape;134;g22e4025cc2c_0_22:notes"/>
+          <p:cNvPr id="176" name="Google Shape;176;g22e4025cc2c_0_22:notes"/>
           <p:cNvSpPr txBox="1"/>
           <p:nvPr>
             <p:ph idx="1" type="body"/>
@@ -1306,7 +1307,7 @@
   <p:cSld>
     <p:spTree>
       <p:nvGrpSpPr>
-        <p:cNvPr id="137" name="Shape 137"/>
+        <p:cNvPr id="179" name="Shape 179"/>
         <p:cNvGrpSpPr/>
         <p:nvPr/>
       </p:nvGrpSpPr>
@@ -1320,7 +1321,7 @@
       </p:grpSpPr>
       <p:sp>
         <p:nvSpPr>
-          <p:cNvPr id="138" name="Google Shape;138;g22e4025cc2c_0_36:notes"/>
+          <p:cNvPr id="180" name="Google Shape;180;g22e4025cc2c_0_36:notes"/>
           <p:cNvSpPr/>
           <p:nvPr>
             <p:ph idx="2" type="sldImg"/>
@@ -1355,7 +1356,7 @@
       </p:sp>
       <p:sp>
         <p:nvSpPr>
-          <p:cNvPr id="139" name="Google Shape;139;g22e4025cc2c_0_36:notes"/>
+          <p:cNvPr id="181" name="Google Shape;181;g22e4025cc2c_0_36:notes"/>
           <p:cNvSpPr txBox="1"/>
           <p:nvPr>
             <p:ph idx="1" type="body"/>
@@ -1405,7 +1406,7 @@
   <p:cSld>
     <p:spTree>
       <p:nvGrpSpPr>
-        <p:cNvPr id="144" name="Shape 144"/>
+        <p:cNvPr id="186" name="Shape 186"/>
         <p:cNvGrpSpPr/>
         <p:nvPr/>
       </p:nvGrpSpPr>
@@ -1419,7 +1420,7 @@
       </p:grpSpPr>
       <p:sp>
         <p:nvSpPr>
-          <p:cNvPr id="145" name="Google Shape;145;g22e4025cc2c_0_26:notes"/>
+          <p:cNvPr id="187" name="Google Shape;187;g22e4025cc2c_0_26:notes"/>
           <p:cNvSpPr/>
           <p:nvPr>
             <p:ph idx="2" type="sldImg"/>
@@ -1454,7 +1455,7 @@
       </p:sp>
       <p:sp>
         <p:nvSpPr>
-          <p:cNvPr id="146" name="Google Shape;146;g22e4025cc2c_0_26:notes"/>
+          <p:cNvPr id="188" name="Google Shape;188;g22e4025cc2c_0_26:notes"/>
           <p:cNvSpPr txBox="1"/>
           <p:nvPr>
             <p:ph idx="1" type="body"/>
@@ -1504,7 +1505,7 @@
   <p:cSld>
     <p:spTree>
       <p:nvGrpSpPr>
-        <p:cNvPr id="149" name="Shape 149"/>
+        <p:cNvPr id="191" name="Shape 191"/>
         <p:cNvGrpSpPr/>
         <p:nvPr/>
       </p:nvGrpSpPr>
@@ -1518,7 +1519,7 @@
       </p:grpSpPr>
       <p:sp>
         <p:nvSpPr>
-          <p:cNvPr id="150" name="Google Shape;150;g22e4025cc2c_0_48:notes"/>
+          <p:cNvPr id="192" name="Google Shape;192;g22e4025cc2c_0_48:notes"/>
           <p:cNvSpPr/>
           <p:nvPr>
             <p:ph idx="2" type="sldImg"/>
@@ -1553,7 +1554,7 @@
       </p:sp>
       <p:sp>
         <p:nvSpPr>
-          <p:cNvPr id="151" name="Google Shape;151;g22e4025cc2c_0_48:notes"/>
+          <p:cNvPr id="193" name="Google Shape;193;g22e4025cc2c_0_48:notes"/>
           <p:cNvSpPr txBox="1"/>
           <p:nvPr>
             <p:ph idx="1" type="body"/>
@@ -1603,7 +1604,7 @@
   <p:cSld>
     <p:spTree>
       <p:nvGrpSpPr>
-        <p:cNvPr id="156" name="Shape 156"/>
+        <p:cNvPr id="198" name="Shape 198"/>
         <p:cNvGrpSpPr/>
         <p:nvPr/>
       </p:nvGrpSpPr>
@@ -1617,7 +1618,7 @@
       </p:grpSpPr>
       <p:sp>
         <p:nvSpPr>
-          <p:cNvPr id="157" name="Google Shape;157;g22e4025cc2c_0_87:notes"/>
+          <p:cNvPr id="199" name="Google Shape;199;g22e4025cc2c_0_87:notes"/>
           <p:cNvSpPr/>
           <p:nvPr>
             <p:ph idx="2" type="sldImg"/>
@@ -1652,7 +1653,7 @@
       </p:sp>
       <p:sp>
         <p:nvSpPr>
-          <p:cNvPr id="158" name="Google Shape;158;g22e4025cc2c_0_87:notes"/>
+          <p:cNvPr id="200" name="Google Shape;200;g22e4025cc2c_0_87:notes"/>
           <p:cNvSpPr txBox="1"/>
           <p:nvPr>
             <p:ph idx="1" type="body"/>
@@ -1702,7 +1703,7 @@
   <p:cSld>
     <p:spTree>
       <p:nvGrpSpPr>
-        <p:cNvPr id="161" name="Shape 161"/>
+        <p:cNvPr id="203" name="Shape 203"/>
         <p:cNvGrpSpPr/>
         <p:nvPr/>
       </p:nvGrpSpPr>
@@ -1716,7 +1717,7 @@
       </p:grpSpPr>
       <p:sp>
         <p:nvSpPr>
-          <p:cNvPr id="162" name="Google Shape;162;g152c562dbb7_0_0:notes"/>
+          <p:cNvPr id="204" name="Google Shape;204;g152c562dbb7_0_0:notes"/>
           <p:cNvSpPr/>
           <p:nvPr>
             <p:ph idx="2" type="sldImg"/>
@@ -1751,7 +1752,7 @@
       </p:sp>
       <p:sp>
         <p:nvSpPr>
-          <p:cNvPr id="163" name="Google Shape;163;g152c562dbb7_0_0:notes"/>
+          <p:cNvPr id="205" name="Google Shape;205;g152c562dbb7_0_0:notes"/>
           <p:cNvSpPr txBox="1"/>
           <p:nvPr>
             <p:ph idx="1" type="body"/>
@@ -1801,7 +1802,7 @@
   <p:cSld>
     <p:spTree>
       <p:nvGrpSpPr>
-        <p:cNvPr id="53" name="Shape 53"/>
+        <p:cNvPr id="95" name="Shape 95"/>
         <p:cNvGrpSpPr/>
         <p:nvPr/>
       </p:nvGrpSpPr>
@@ -1815,7 +1816,7 @@
       </p:grpSpPr>
       <p:sp>
         <p:nvSpPr>
-          <p:cNvPr id="54" name="Google Shape;54;gf17014c61d_0_0:notes"/>
+          <p:cNvPr id="96" name="Google Shape;96;gf17014c61d_0_0:notes"/>
           <p:cNvSpPr/>
           <p:nvPr>
             <p:ph idx="2" type="sldImg"/>
@@ -1850,7 +1851,7 @@
       </p:sp>
       <p:sp>
         <p:nvSpPr>
-          <p:cNvPr id="55" name="Google Shape;55;gf17014c61d_0_0:notes"/>
+          <p:cNvPr id="97" name="Google Shape;97;gf17014c61d_0_0:notes"/>
           <p:cNvSpPr txBox="1"/>
           <p:nvPr>
             <p:ph idx="1" type="body"/>
@@ -1900,7 +1901,7 @@
   <p:cSld>
     <p:spTree>
       <p:nvGrpSpPr>
-        <p:cNvPr id="168" name="Shape 168"/>
+        <p:cNvPr id="210" name="Shape 210"/>
         <p:cNvGrpSpPr/>
         <p:nvPr/>
       </p:nvGrpSpPr>
@@ -1914,7 +1915,7 @@
       </p:grpSpPr>
       <p:sp>
         <p:nvSpPr>
-          <p:cNvPr id="169" name="Google Shape;169;g22e4025cc2c_0_54:notes"/>
+          <p:cNvPr id="211" name="Google Shape;211;g22e4025cc2c_0_54:notes"/>
           <p:cNvSpPr/>
           <p:nvPr>
             <p:ph idx="2" type="sldImg"/>
@@ -1949,7 +1950,7 @@
       </p:sp>
       <p:sp>
         <p:nvSpPr>
-          <p:cNvPr id="170" name="Google Shape;170;g22e4025cc2c_0_54:notes"/>
+          <p:cNvPr id="212" name="Google Shape;212;g22e4025cc2c_0_54:notes"/>
           <p:cNvSpPr txBox="1"/>
           <p:nvPr>
             <p:ph idx="1" type="body"/>
@@ -1999,7 +2000,7 @@
   <p:cSld>
     <p:spTree>
       <p:nvGrpSpPr>
-        <p:cNvPr id="175" name="Shape 175"/>
+        <p:cNvPr id="217" name="Shape 217"/>
         <p:cNvGrpSpPr/>
         <p:nvPr/>
       </p:nvGrpSpPr>
@@ -2013,7 +2014,7 @@
       </p:grpSpPr>
       <p:sp>
         <p:nvSpPr>
-          <p:cNvPr id="176" name="Google Shape;176;g2397894af99_0_38:notes"/>
+          <p:cNvPr id="218" name="Google Shape;218;g2397894af99_0_38:notes"/>
           <p:cNvSpPr/>
           <p:nvPr>
             <p:ph idx="2" type="sldImg"/>
@@ -2048,7 +2049,7 @@
       </p:sp>
       <p:sp>
         <p:nvSpPr>
-          <p:cNvPr id="177" name="Google Shape;177;g2397894af99_0_38:notes"/>
+          <p:cNvPr id="219" name="Google Shape;219;g2397894af99_0_38:notes"/>
           <p:cNvSpPr txBox="1"/>
           <p:nvPr>
             <p:ph idx="1" type="body"/>
@@ -2098,7 +2099,7 @@
   <p:cSld>
     <p:spTree>
       <p:nvGrpSpPr>
-        <p:cNvPr id="181" name="Shape 181"/>
+        <p:cNvPr id="223" name="Shape 223"/>
         <p:cNvGrpSpPr/>
         <p:nvPr/>
       </p:nvGrpSpPr>
@@ -2112,7 +2113,7 @@
       </p:grpSpPr>
       <p:sp>
         <p:nvSpPr>
-          <p:cNvPr id="182" name="Google Shape;182;g2397894af99_0_43:notes"/>
+          <p:cNvPr id="224" name="Google Shape;224;g2397894af99_0_43:notes"/>
           <p:cNvSpPr/>
           <p:nvPr>
             <p:ph idx="2" type="sldImg"/>
@@ -2147,7 +2148,7 @@
       </p:sp>
       <p:sp>
         <p:nvSpPr>
-          <p:cNvPr id="183" name="Google Shape;183;g2397894af99_0_43:notes"/>
+          <p:cNvPr id="225" name="Google Shape;225;g2397894af99_0_43:notes"/>
           <p:cNvSpPr txBox="1"/>
           <p:nvPr>
             <p:ph idx="1" type="body"/>
@@ -2197,7 +2198,7 @@
   <p:cSld>
     <p:spTree>
       <p:nvGrpSpPr>
-        <p:cNvPr id="60" name="Shape 60"/>
+        <p:cNvPr id="102" name="Shape 102"/>
         <p:cNvGrpSpPr/>
         <p:nvPr/>
       </p:nvGrpSpPr>
@@ -2211,7 +2212,7 @@
       </p:grpSpPr>
       <p:sp>
         <p:nvSpPr>
-          <p:cNvPr id="61" name="Google Shape;61;g152a3f74d0d_0_34:notes"/>
+          <p:cNvPr id="103" name="Google Shape;103;g152a3f74d0d_0_34:notes"/>
           <p:cNvSpPr/>
           <p:nvPr>
             <p:ph idx="2" type="sldImg"/>
@@ -2246,7 +2247,7 @@
       </p:sp>
       <p:sp>
         <p:nvSpPr>
-          <p:cNvPr id="62" name="Google Shape;62;g152a3f74d0d_0_34:notes"/>
+          <p:cNvPr id="104" name="Google Shape;104;g152a3f74d0d_0_34:notes"/>
           <p:cNvSpPr txBox="1"/>
           <p:nvPr>
             <p:ph idx="1" type="body"/>
@@ -2296,7 +2297,7 @@
   <p:cSld>
     <p:spTree>
       <p:nvGrpSpPr>
-        <p:cNvPr id="65" name="Shape 65"/>
+        <p:cNvPr id="107" name="Shape 107"/>
         <p:cNvGrpSpPr/>
         <p:nvPr/>
       </p:nvGrpSpPr>
@@ -2310,7 +2311,7 @@
       </p:grpSpPr>
       <p:sp>
         <p:nvSpPr>
-          <p:cNvPr id="66" name="Google Shape;66;g152a3f74d0d_0_57:notes"/>
+          <p:cNvPr id="108" name="Google Shape;108;g152a3f74d0d_0_57:notes"/>
           <p:cNvSpPr/>
           <p:nvPr>
             <p:ph idx="2" type="sldImg"/>
@@ -2345,7 +2346,7 @@
       </p:sp>
       <p:sp>
         <p:nvSpPr>
-          <p:cNvPr id="67" name="Google Shape;67;g152a3f74d0d_0_57:notes"/>
+          <p:cNvPr id="109" name="Google Shape;109;g152a3f74d0d_0_57:notes"/>
           <p:cNvSpPr txBox="1"/>
           <p:nvPr>
             <p:ph idx="1" type="body"/>
@@ -2395,7 +2396,7 @@
   <p:cSld>
     <p:spTree>
       <p:nvGrpSpPr>
-        <p:cNvPr id="72" name="Shape 72"/>
+        <p:cNvPr id="114" name="Shape 114"/>
         <p:cNvGrpSpPr/>
         <p:nvPr/>
       </p:nvGrpSpPr>
@@ -2409,7 +2410,7 @@
       </p:grpSpPr>
       <p:sp>
         <p:nvSpPr>
-          <p:cNvPr id="73" name="Google Shape;73;g22e4025cc2c_0_60:notes"/>
+          <p:cNvPr id="115" name="Google Shape;115;g22e4025cc2c_0_60:notes"/>
           <p:cNvSpPr/>
           <p:nvPr>
             <p:ph idx="2" type="sldImg"/>
@@ -2444,7 +2445,7 @@
       </p:sp>
       <p:sp>
         <p:nvSpPr>
-          <p:cNvPr id="74" name="Google Shape;74;g22e4025cc2c_0_60:notes"/>
+          <p:cNvPr id="116" name="Google Shape;116;g22e4025cc2c_0_60:notes"/>
           <p:cNvSpPr txBox="1"/>
           <p:nvPr>
             <p:ph idx="1" type="body"/>
@@ -2494,7 +2495,7 @@
   <p:cSld>
     <p:spTree>
       <p:nvGrpSpPr>
-        <p:cNvPr id="79" name="Shape 79"/>
+        <p:cNvPr id="121" name="Shape 121"/>
         <p:cNvGrpSpPr/>
         <p:nvPr/>
       </p:nvGrpSpPr>
@@ -2508,7 +2509,7 @@
       </p:grpSpPr>
       <p:sp>
         <p:nvSpPr>
-          <p:cNvPr id="80" name="Google Shape;80;g22e4025cc2c_0_66:notes"/>
+          <p:cNvPr id="122" name="Google Shape;122;g22e4025cc2c_0_66:notes"/>
           <p:cNvSpPr/>
           <p:nvPr>
             <p:ph idx="2" type="sldImg"/>
@@ -2543,7 +2544,7 @@
       </p:sp>
       <p:sp>
         <p:nvSpPr>
-          <p:cNvPr id="81" name="Google Shape;81;g22e4025cc2c_0_66:notes"/>
+          <p:cNvPr id="123" name="Google Shape;123;g22e4025cc2c_0_66:notes"/>
           <p:cNvSpPr txBox="1"/>
           <p:nvPr>
             <p:ph idx="1" type="body"/>
@@ -2593,7 +2594,7 @@
   <p:cSld>
     <p:spTree>
       <p:nvGrpSpPr>
-        <p:cNvPr id="86" name="Shape 86"/>
+        <p:cNvPr id="128" name="Shape 128"/>
         <p:cNvGrpSpPr/>
         <p:nvPr/>
       </p:nvGrpSpPr>
@@ -2607,7 +2608,7 @@
       </p:grpSpPr>
       <p:sp>
         <p:nvSpPr>
-          <p:cNvPr id="87" name="Google Shape;87;g22e4025cc2c_0_8:notes"/>
+          <p:cNvPr id="129" name="Google Shape;129;g22e4025cc2c_0_8:notes"/>
           <p:cNvSpPr/>
           <p:nvPr>
             <p:ph idx="2" type="sldImg"/>
@@ -2642,7 +2643,7 @@
       </p:sp>
       <p:sp>
         <p:nvSpPr>
-          <p:cNvPr id="88" name="Google Shape;88;g22e4025cc2c_0_8:notes"/>
+          <p:cNvPr id="130" name="Google Shape;130;g22e4025cc2c_0_8:notes"/>
           <p:cNvSpPr txBox="1"/>
           <p:nvPr>
             <p:ph idx="1" type="body"/>
@@ -2692,7 +2693,7 @@
   <p:cSld>
     <p:spTree>
       <p:nvGrpSpPr>
-        <p:cNvPr id="91" name="Shape 91"/>
+        <p:cNvPr id="133" name="Shape 133"/>
         <p:cNvGrpSpPr/>
         <p:nvPr/>
       </p:nvGrpSpPr>
@@ -2706,7 +2707,7 @@
       </p:grpSpPr>
       <p:sp>
         <p:nvSpPr>
-          <p:cNvPr id="92" name="Google Shape;92;g22e4025cc2c_0_12:notes"/>
+          <p:cNvPr id="134" name="Google Shape;134;g22e4025cc2c_0_12:notes"/>
           <p:cNvSpPr/>
           <p:nvPr>
             <p:ph idx="2" type="sldImg"/>
@@ -2741,7 +2742,7 @@
       </p:sp>
       <p:sp>
         <p:nvSpPr>
-          <p:cNvPr id="93" name="Google Shape;93;g22e4025cc2c_0_12:notes"/>
+          <p:cNvPr id="135" name="Google Shape;135;g22e4025cc2c_0_12:notes"/>
           <p:cNvSpPr txBox="1"/>
           <p:nvPr>
             <p:ph idx="1" type="body"/>
@@ -2791,7 +2792,7 @@
   <p:cSld>
     <p:spTree>
       <p:nvGrpSpPr>
-        <p:cNvPr id="98" name="Shape 98"/>
+        <p:cNvPr id="140" name="Shape 140"/>
         <p:cNvGrpSpPr/>
         <p:nvPr/>
       </p:nvGrpSpPr>
@@ -2805,7 +2806,7 @@
       </p:grpSpPr>
       <p:sp>
         <p:nvSpPr>
-          <p:cNvPr id="99" name="Google Shape;99;g22e4025cc2c_0_72:notes"/>
+          <p:cNvPr id="141" name="Google Shape;141;g22e4025cc2c_0_72:notes"/>
           <p:cNvSpPr/>
           <p:nvPr>
             <p:ph idx="2" type="sldImg"/>
@@ -2840,7 +2841,7 @@
       </p:sp>
       <p:sp>
         <p:nvSpPr>
-          <p:cNvPr id="100" name="Google Shape;100;g22e4025cc2c_0_72:notes"/>
+          <p:cNvPr id="142" name="Google Shape;142;g22e4025cc2c_0_72:notes"/>
           <p:cNvSpPr txBox="1"/>
           <p:nvPr>
             <p:ph idx="1" type="body"/>
@@ -3331,6 +3332,1169 @@
           </p:txBody>
         </p:sp>
       </p:grpSp>
+    </p:spTree>
+  </p:cSld>
+  <p:clrMapOvr>
+    <a:masterClrMapping/>
+  </p:clrMapOvr>
+</p:sldLayout>
+</file>
+
+<file path=ppt/slideLayouts/slideLayout10.xml><?xml version="1.0" encoding="utf-8"?>
+<p:sldLayout xmlns:a="http://schemas.openxmlformats.org/drawingml/2006/main" xmlns:r="http://schemas.openxmlformats.org/officeDocument/2006/relationships" xmlns:mc="http://schemas.openxmlformats.org/markup-compatibility/2006" xmlns:mv="urn:schemas-microsoft-com:mac:vml" xmlns:p="http://schemas.openxmlformats.org/presentationml/2006/main" xmlns:c="http://schemas.openxmlformats.org/drawingml/2006/chart" xmlns:dgm="http://schemas.openxmlformats.org/drawingml/2006/diagram" xmlns:o="urn:schemas-microsoft-com:office:office" xmlns:v="urn:schemas-microsoft-com:vml" xmlns:pvml="urn:schemas-microsoft-com:office:powerpoint" xmlns:com="http://schemas.openxmlformats.org/drawingml/2006/compatibility" xmlns:p14="http://schemas.microsoft.com/office/powerpoint/2010/main" xmlns:p15="http://schemas.microsoft.com/office/powerpoint/2012/main" xmlns:ahyp="http://schemas.microsoft.com/office/drawing/2018/hyperlinkcolor" matchingName="Title and two columns" type="twoColTx">
+  <p:cSld name="TITLE_AND_TWO_COLUMNS">
+    <p:spTree>
+      <p:nvGrpSpPr>
+        <p:cNvPr id="72" name="Shape 72"/>
+        <p:cNvGrpSpPr/>
+        <p:nvPr/>
+      </p:nvGrpSpPr>
+      <p:grpSpPr>
+        <a:xfrm>
+          <a:off x="0" y="0"/>
+          <a:ext cx="0" cy="0"/>
+          <a:chOff x="0" y="0"/>
+          <a:chExt cx="0" cy="0"/>
+        </a:xfrm>
+      </p:grpSpPr>
+      <p:sp>
+        <p:nvSpPr>
+          <p:cNvPr id="73" name="Google Shape;73;p12"/>
+          <p:cNvSpPr txBox="1"/>
+          <p:nvPr>
+            <p:ph type="title"/>
+          </p:nvPr>
+        </p:nvSpPr>
+        <p:spPr>
+          <a:xfrm>
+            <a:off x="0" y="0"/>
+            <a:ext cx="9144000" cy="685800"/>
+          </a:xfrm>
+          <a:prstGeom prst="rect">
+            <a:avLst/>
+          </a:prstGeom>
+          <a:ln>
+            <a:noFill/>
+          </a:ln>
+        </p:spPr>
+        <p:txBody>
+          <a:bodyPr anchorCtr="0" anchor="ctr" bIns="0" lIns="274300" spcFirstLastPara="1" rIns="0" wrap="square" tIns="0">
+            <a:noAutofit/>
+          </a:bodyPr>
+          <a:lstStyle>
+            <a:lvl1pPr lvl="0">
+              <a:spcBef>
+                <a:spcPts val="0"/>
+              </a:spcBef>
+              <a:spcAft>
+                <a:spcPts val="0"/>
+              </a:spcAft>
+              <a:buSzPts val="2400"/>
+              <a:buNone/>
+              <a:defRPr/>
+            </a:lvl1pPr>
+            <a:lvl2pPr lvl="1">
+              <a:spcBef>
+                <a:spcPts val="0"/>
+              </a:spcBef>
+              <a:spcAft>
+                <a:spcPts val="0"/>
+              </a:spcAft>
+              <a:buSzPts val="2800"/>
+              <a:buNone/>
+              <a:defRPr/>
+            </a:lvl2pPr>
+            <a:lvl3pPr lvl="2">
+              <a:spcBef>
+                <a:spcPts val="0"/>
+              </a:spcBef>
+              <a:spcAft>
+                <a:spcPts val="0"/>
+              </a:spcAft>
+              <a:buSzPts val="2800"/>
+              <a:buNone/>
+              <a:defRPr/>
+            </a:lvl3pPr>
+            <a:lvl4pPr lvl="3">
+              <a:spcBef>
+                <a:spcPts val="0"/>
+              </a:spcBef>
+              <a:spcAft>
+                <a:spcPts val="0"/>
+              </a:spcAft>
+              <a:buSzPts val="2800"/>
+              <a:buNone/>
+              <a:defRPr/>
+            </a:lvl4pPr>
+            <a:lvl5pPr lvl="4">
+              <a:spcBef>
+                <a:spcPts val="0"/>
+              </a:spcBef>
+              <a:spcAft>
+                <a:spcPts val="0"/>
+              </a:spcAft>
+              <a:buSzPts val="2800"/>
+              <a:buNone/>
+              <a:defRPr/>
+            </a:lvl5pPr>
+            <a:lvl6pPr lvl="5">
+              <a:spcBef>
+                <a:spcPts val="0"/>
+              </a:spcBef>
+              <a:spcAft>
+                <a:spcPts val="0"/>
+              </a:spcAft>
+              <a:buSzPts val="2800"/>
+              <a:buNone/>
+              <a:defRPr/>
+            </a:lvl6pPr>
+            <a:lvl7pPr lvl="6">
+              <a:spcBef>
+                <a:spcPts val="0"/>
+              </a:spcBef>
+              <a:spcAft>
+                <a:spcPts val="0"/>
+              </a:spcAft>
+              <a:buSzPts val="2800"/>
+              <a:buNone/>
+              <a:defRPr/>
+            </a:lvl7pPr>
+            <a:lvl8pPr lvl="7">
+              <a:spcBef>
+                <a:spcPts val="0"/>
+              </a:spcBef>
+              <a:spcAft>
+                <a:spcPts val="0"/>
+              </a:spcAft>
+              <a:buSzPts val="2800"/>
+              <a:buNone/>
+              <a:defRPr/>
+            </a:lvl8pPr>
+            <a:lvl9pPr lvl="8">
+              <a:spcBef>
+                <a:spcPts val="0"/>
+              </a:spcBef>
+              <a:spcAft>
+                <a:spcPts val="0"/>
+              </a:spcAft>
+              <a:buSzPts val="2800"/>
+              <a:buNone/>
+              <a:defRPr/>
+            </a:lvl9pPr>
+          </a:lstStyle>
+          <a:p/>
+        </p:txBody>
+      </p:sp>
+      <p:sp>
+        <p:nvSpPr>
+          <p:cNvPr id="74" name="Google Shape;74;p12"/>
+          <p:cNvSpPr txBox="1"/>
+          <p:nvPr>
+            <p:ph idx="1" type="body"/>
+          </p:nvPr>
+        </p:nvSpPr>
+        <p:spPr>
+          <a:xfrm>
+            <a:off x="274320" y="914400"/>
+            <a:ext cx="4114800" cy="4114800"/>
+          </a:xfrm>
+          <a:prstGeom prst="rect">
+            <a:avLst/>
+          </a:prstGeom>
+        </p:spPr>
+        <p:txBody>
+          <a:bodyPr anchorCtr="0" anchor="t" bIns="91425" lIns="0" spcFirstLastPara="1" rIns="91425" wrap="square" tIns="0">
+            <a:noAutofit/>
+          </a:bodyPr>
+          <a:lstStyle>
+            <a:lvl1pPr indent="-342900" lvl="0" marL="457200">
+              <a:spcBef>
+                <a:spcPts val="0"/>
+              </a:spcBef>
+              <a:spcAft>
+                <a:spcPts val="0"/>
+              </a:spcAft>
+              <a:buSzPts val="1800"/>
+              <a:buChar char="●"/>
+              <a:defRPr/>
+            </a:lvl1pPr>
+            <a:lvl2pPr indent="-317500" lvl="1" marL="914400">
+              <a:spcBef>
+                <a:spcPts val="0"/>
+              </a:spcBef>
+              <a:spcAft>
+                <a:spcPts val="0"/>
+              </a:spcAft>
+              <a:buSzPts val="1400"/>
+              <a:buChar char="○"/>
+              <a:defRPr/>
+            </a:lvl2pPr>
+            <a:lvl3pPr indent="-317500" lvl="2" marL="1371600">
+              <a:spcBef>
+                <a:spcPts val="0"/>
+              </a:spcBef>
+              <a:spcAft>
+                <a:spcPts val="0"/>
+              </a:spcAft>
+              <a:buSzPts val="1400"/>
+              <a:buChar char="■"/>
+              <a:defRPr/>
+            </a:lvl3pPr>
+            <a:lvl4pPr indent="-317500" lvl="3" marL="1828800">
+              <a:spcBef>
+                <a:spcPts val="0"/>
+              </a:spcBef>
+              <a:spcAft>
+                <a:spcPts val="0"/>
+              </a:spcAft>
+              <a:buSzPts val="1400"/>
+              <a:buChar char="●"/>
+              <a:defRPr/>
+            </a:lvl4pPr>
+            <a:lvl5pPr indent="-317500" lvl="4" marL="2286000">
+              <a:spcBef>
+                <a:spcPts val="0"/>
+              </a:spcBef>
+              <a:spcAft>
+                <a:spcPts val="0"/>
+              </a:spcAft>
+              <a:buSzPts val="1400"/>
+              <a:buChar char="○"/>
+              <a:defRPr/>
+            </a:lvl5pPr>
+            <a:lvl6pPr indent="-317500" lvl="5" marL="2743200">
+              <a:spcBef>
+                <a:spcPts val="0"/>
+              </a:spcBef>
+              <a:spcAft>
+                <a:spcPts val="0"/>
+              </a:spcAft>
+              <a:buSzPts val="1400"/>
+              <a:buChar char="■"/>
+              <a:defRPr/>
+            </a:lvl6pPr>
+            <a:lvl7pPr indent="-317500" lvl="6" marL="3200400">
+              <a:spcBef>
+                <a:spcPts val="0"/>
+              </a:spcBef>
+              <a:spcAft>
+                <a:spcPts val="0"/>
+              </a:spcAft>
+              <a:buSzPts val="1400"/>
+              <a:buChar char="●"/>
+              <a:defRPr/>
+            </a:lvl7pPr>
+            <a:lvl8pPr indent="-317500" lvl="7" marL="3657600">
+              <a:spcBef>
+                <a:spcPts val="0"/>
+              </a:spcBef>
+              <a:spcAft>
+                <a:spcPts val="0"/>
+              </a:spcAft>
+              <a:buSzPts val="1400"/>
+              <a:buChar char="○"/>
+              <a:defRPr/>
+            </a:lvl8pPr>
+            <a:lvl9pPr indent="-317500" lvl="8" marL="4114800">
+              <a:spcBef>
+                <a:spcPts val="0"/>
+              </a:spcBef>
+              <a:spcAft>
+                <a:spcPts val="0"/>
+              </a:spcAft>
+              <a:buSzPts val="1400"/>
+              <a:buChar char="■"/>
+              <a:defRPr/>
+            </a:lvl9pPr>
+          </a:lstStyle>
+          <a:p/>
+        </p:txBody>
+      </p:sp>
+      <p:sp>
+        <p:nvSpPr>
+          <p:cNvPr id="75" name="Google Shape;75;p12"/>
+          <p:cNvSpPr txBox="1"/>
+          <p:nvPr>
+            <p:ph idx="2" type="body"/>
+          </p:nvPr>
+        </p:nvSpPr>
+        <p:spPr>
+          <a:xfrm>
+            <a:off x="4846320" y="914400"/>
+            <a:ext cx="4114800" cy="4114800"/>
+          </a:xfrm>
+          <a:prstGeom prst="rect">
+            <a:avLst/>
+          </a:prstGeom>
+        </p:spPr>
+        <p:txBody>
+          <a:bodyPr anchorCtr="0" anchor="t" bIns="0" lIns="0" spcFirstLastPara="1" rIns="0" wrap="square" tIns="0">
+            <a:noAutofit/>
+          </a:bodyPr>
+          <a:lstStyle>
+            <a:lvl1pPr indent="-342900" lvl="0" marL="457200">
+              <a:spcBef>
+                <a:spcPts val="0"/>
+              </a:spcBef>
+              <a:spcAft>
+                <a:spcPts val="0"/>
+              </a:spcAft>
+              <a:buSzPts val="1800"/>
+              <a:buChar char="●"/>
+              <a:defRPr/>
+            </a:lvl1pPr>
+            <a:lvl2pPr indent="-317500" lvl="1" marL="914400">
+              <a:spcBef>
+                <a:spcPts val="0"/>
+              </a:spcBef>
+              <a:spcAft>
+                <a:spcPts val="0"/>
+              </a:spcAft>
+              <a:buSzPts val="1400"/>
+              <a:buChar char="○"/>
+              <a:defRPr/>
+            </a:lvl2pPr>
+            <a:lvl3pPr indent="-317500" lvl="2" marL="1371600">
+              <a:spcBef>
+                <a:spcPts val="0"/>
+              </a:spcBef>
+              <a:spcAft>
+                <a:spcPts val="0"/>
+              </a:spcAft>
+              <a:buSzPts val="1400"/>
+              <a:buChar char="■"/>
+              <a:defRPr/>
+            </a:lvl3pPr>
+            <a:lvl4pPr indent="-317500" lvl="3" marL="1828800">
+              <a:spcBef>
+                <a:spcPts val="0"/>
+              </a:spcBef>
+              <a:spcAft>
+                <a:spcPts val="0"/>
+              </a:spcAft>
+              <a:buSzPts val="1400"/>
+              <a:buChar char="●"/>
+              <a:defRPr/>
+            </a:lvl4pPr>
+            <a:lvl5pPr indent="-317500" lvl="4" marL="2286000">
+              <a:spcBef>
+                <a:spcPts val="0"/>
+              </a:spcBef>
+              <a:spcAft>
+                <a:spcPts val="0"/>
+              </a:spcAft>
+              <a:buSzPts val="1400"/>
+              <a:buChar char="○"/>
+              <a:defRPr/>
+            </a:lvl5pPr>
+            <a:lvl6pPr indent="-317500" lvl="5" marL="2743200">
+              <a:spcBef>
+                <a:spcPts val="0"/>
+              </a:spcBef>
+              <a:spcAft>
+                <a:spcPts val="0"/>
+              </a:spcAft>
+              <a:buSzPts val="1400"/>
+              <a:buChar char="■"/>
+              <a:defRPr/>
+            </a:lvl6pPr>
+            <a:lvl7pPr indent="-317500" lvl="6" marL="3200400">
+              <a:spcBef>
+                <a:spcPts val="0"/>
+              </a:spcBef>
+              <a:spcAft>
+                <a:spcPts val="0"/>
+              </a:spcAft>
+              <a:buSzPts val="1400"/>
+              <a:buChar char="●"/>
+              <a:defRPr/>
+            </a:lvl7pPr>
+            <a:lvl8pPr indent="-317500" lvl="7" marL="3657600">
+              <a:spcBef>
+                <a:spcPts val="0"/>
+              </a:spcBef>
+              <a:spcAft>
+                <a:spcPts val="0"/>
+              </a:spcAft>
+              <a:buSzPts val="1400"/>
+              <a:buChar char="○"/>
+              <a:defRPr/>
+            </a:lvl8pPr>
+            <a:lvl9pPr indent="-317500" lvl="8" marL="4114800">
+              <a:spcBef>
+                <a:spcPts val="0"/>
+              </a:spcBef>
+              <a:spcAft>
+                <a:spcPts val="0"/>
+              </a:spcAft>
+              <a:buSzPts val="1400"/>
+              <a:buChar char="■"/>
+              <a:defRPr/>
+            </a:lvl9pPr>
+          </a:lstStyle>
+          <a:p/>
+        </p:txBody>
+      </p:sp>
+      <p:sp>
+        <p:nvSpPr>
+          <p:cNvPr id="76" name="Google Shape;76;p12"/>
+          <p:cNvSpPr txBox="1"/>
+          <p:nvPr>
+            <p:ph idx="12" type="sldNum"/>
+          </p:nvPr>
+        </p:nvSpPr>
+        <p:spPr>
+          <a:xfrm>
+            <a:off x="7315202" y="4416550"/>
+            <a:ext cx="1828800" cy="731400"/>
+          </a:xfrm>
+          <a:prstGeom prst="rect">
+            <a:avLst/>
+          </a:prstGeom>
+        </p:spPr>
+        <p:txBody>
+          <a:bodyPr anchorCtr="0" anchor="b" bIns="91425" lIns="91425" spcFirstLastPara="1" rIns="91425" wrap="square" tIns="91425">
+            <a:noAutofit/>
+          </a:bodyPr>
+          <a:lstStyle>
+            <a:lvl1pPr lvl="0">
+              <a:buNone/>
+              <a:defRPr>
+                <a:solidFill>
+                  <a:schemeClr val="dk1"/>
+                </a:solidFill>
+              </a:defRPr>
+            </a:lvl1pPr>
+            <a:lvl2pPr lvl="1">
+              <a:buNone/>
+              <a:defRPr>
+                <a:solidFill>
+                  <a:schemeClr val="dk1"/>
+                </a:solidFill>
+              </a:defRPr>
+            </a:lvl2pPr>
+            <a:lvl3pPr lvl="2">
+              <a:buNone/>
+              <a:defRPr>
+                <a:solidFill>
+                  <a:schemeClr val="dk1"/>
+                </a:solidFill>
+              </a:defRPr>
+            </a:lvl3pPr>
+            <a:lvl4pPr lvl="3">
+              <a:buNone/>
+              <a:defRPr>
+                <a:solidFill>
+                  <a:schemeClr val="dk1"/>
+                </a:solidFill>
+              </a:defRPr>
+            </a:lvl4pPr>
+            <a:lvl5pPr lvl="4">
+              <a:buNone/>
+              <a:defRPr>
+                <a:solidFill>
+                  <a:schemeClr val="dk1"/>
+                </a:solidFill>
+              </a:defRPr>
+            </a:lvl5pPr>
+            <a:lvl6pPr lvl="5">
+              <a:buNone/>
+              <a:defRPr>
+                <a:solidFill>
+                  <a:schemeClr val="dk1"/>
+                </a:solidFill>
+              </a:defRPr>
+            </a:lvl6pPr>
+            <a:lvl7pPr lvl="6">
+              <a:buNone/>
+              <a:defRPr>
+                <a:solidFill>
+                  <a:schemeClr val="dk1"/>
+                </a:solidFill>
+              </a:defRPr>
+            </a:lvl7pPr>
+            <a:lvl8pPr lvl="7">
+              <a:buNone/>
+              <a:defRPr>
+                <a:solidFill>
+                  <a:schemeClr val="dk1"/>
+                </a:solidFill>
+              </a:defRPr>
+            </a:lvl8pPr>
+            <a:lvl9pPr lvl="8">
+              <a:buNone/>
+              <a:defRPr>
+                <a:solidFill>
+                  <a:schemeClr val="dk1"/>
+                </a:solidFill>
+              </a:defRPr>
+            </a:lvl9pPr>
+          </a:lstStyle>
+          <a:p>
+            <a:pPr indent="0" lvl="0" marL="0" rtl="0" algn="r">
+              <a:spcBef>
+                <a:spcPts val="0"/>
+              </a:spcBef>
+              <a:spcAft>
+                <a:spcPts val="0"/>
+              </a:spcAft>
+              <a:buNone/>
+            </a:pPr>
+            <a:fld id="{00000000-1234-1234-1234-123412341234}" type="slidenum">
+              <a:rPr lang="en"/>
+              <a:t>‹#›</a:t>
+            </a:fld>
+            <a:endParaRPr/>
+          </a:p>
+          <a:p>
+            <a:pPr indent="0" lvl="0" marL="0" rtl="0" algn="r">
+              <a:spcBef>
+                <a:spcPts val="0"/>
+              </a:spcBef>
+              <a:spcAft>
+                <a:spcPts val="0"/>
+              </a:spcAft>
+              <a:buClr>
+                <a:schemeClr val="dk1"/>
+              </a:buClr>
+              <a:buSzPts val="1100"/>
+              <a:buFont typeface="Arial"/>
+              <a:buNone/>
+            </a:pPr>
+            <a:r>
+              <a:rPr b="0" lang="en" sz="900" u="sng">
+                <a:solidFill>
+                  <a:schemeClr val="hlink"/>
+                </a:solidFill>
+                <a:hlinkClick r:id="rId2"/>
+              </a:rPr>
+              <a:t>https://uni1.de/amos</a:t>
+            </a:r>
+            <a:r>
+              <a:rPr b="0" lang="en" sz="900">
+                <a:solidFill>
+                  <a:schemeClr val="dk2"/>
+                </a:solidFill>
+              </a:rPr>
+              <a:t> </a:t>
+            </a:r>
+            <a:endParaRPr b="0" sz="900">
+              <a:solidFill>
+                <a:schemeClr val="dk2"/>
+              </a:solidFill>
+            </a:endParaRPr>
+          </a:p>
+        </p:txBody>
+      </p:sp>
+      <p:grpSp>
+        <p:nvGrpSpPr>
+          <p:cNvPr id="77" name="Google Shape;77;p12"/>
+          <p:cNvGrpSpPr/>
+          <p:nvPr/>
+        </p:nvGrpSpPr>
+        <p:grpSpPr>
+          <a:xfrm>
+            <a:off x="0" y="685800"/>
+            <a:ext cx="9144000" cy="91500"/>
+            <a:chOff x="0" y="2386584"/>
+            <a:chExt cx="9144000" cy="91500"/>
+          </a:xfrm>
+        </p:grpSpPr>
+        <p:sp>
+          <p:nvSpPr>
+            <p:cNvPr id="78" name="Google Shape;78;p12"/>
+            <p:cNvSpPr/>
+            <p:nvPr/>
+          </p:nvSpPr>
+          <p:spPr>
+            <a:xfrm>
+              <a:off x="0" y="2386584"/>
+              <a:ext cx="914400" cy="91500"/>
+            </a:xfrm>
+            <a:prstGeom prst="rect">
+              <a:avLst/>
+            </a:prstGeom>
+            <a:solidFill>
+              <a:schemeClr val="accent2"/>
+            </a:solidFill>
+            <a:ln>
+              <a:noFill/>
+            </a:ln>
+          </p:spPr>
+          <p:txBody>
+            <a:bodyPr anchorCtr="0" anchor="ctr" bIns="91425" lIns="91425" spcFirstLastPara="1" rIns="91425" wrap="square" tIns="91425">
+              <a:noAutofit/>
+            </a:bodyPr>
+            <a:lstStyle/>
+            <a:p>
+              <a:pPr indent="0" lvl="0" marL="0" rtl="0" algn="l">
+                <a:spcBef>
+                  <a:spcPts val="0"/>
+                </a:spcBef>
+                <a:spcAft>
+                  <a:spcPts val="0"/>
+                </a:spcAft>
+                <a:buNone/>
+              </a:pPr>
+              <a:r>
+                <a:t/>
+              </a:r>
+              <a:endParaRPr/>
+            </a:p>
+          </p:txBody>
+        </p:sp>
+        <p:sp>
+          <p:nvSpPr>
+            <p:cNvPr id="79" name="Google Shape;79;p12"/>
+            <p:cNvSpPr/>
+            <p:nvPr/>
+          </p:nvSpPr>
+          <p:spPr>
+            <a:xfrm>
+              <a:off x="914400" y="2386584"/>
+              <a:ext cx="1828800" cy="91500"/>
+            </a:xfrm>
+            <a:prstGeom prst="rect">
+              <a:avLst/>
+            </a:prstGeom>
+            <a:solidFill>
+              <a:schemeClr val="accent3"/>
+            </a:solidFill>
+            <a:ln>
+              <a:noFill/>
+            </a:ln>
+          </p:spPr>
+          <p:txBody>
+            <a:bodyPr anchorCtr="0" anchor="ctr" bIns="91425" lIns="91425" spcFirstLastPara="1" rIns="91425" wrap="square" tIns="91425">
+              <a:noAutofit/>
+            </a:bodyPr>
+            <a:lstStyle/>
+            <a:p>
+              <a:pPr indent="0" lvl="0" marL="0" rtl="0" algn="l">
+                <a:spcBef>
+                  <a:spcPts val="0"/>
+                </a:spcBef>
+                <a:spcAft>
+                  <a:spcPts val="0"/>
+                </a:spcAft>
+                <a:buNone/>
+              </a:pPr>
+              <a:r>
+                <a:t/>
+              </a:r>
+              <a:endParaRPr/>
+            </a:p>
+          </p:txBody>
+        </p:sp>
+        <p:sp>
+          <p:nvSpPr>
+            <p:cNvPr id="80" name="Google Shape;80;p12"/>
+            <p:cNvSpPr/>
+            <p:nvPr/>
+          </p:nvSpPr>
+          <p:spPr>
+            <a:xfrm>
+              <a:off x="2743200" y="2386584"/>
+              <a:ext cx="6400800" cy="91500"/>
+            </a:xfrm>
+            <a:prstGeom prst="rect">
+              <a:avLst/>
+            </a:prstGeom>
+            <a:solidFill>
+              <a:schemeClr val="accent4"/>
+            </a:solidFill>
+            <a:ln>
+              <a:noFill/>
+            </a:ln>
+          </p:spPr>
+          <p:txBody>
+            <a:bodyPr anchorCtr="0" anchor="ctr" bIns="91425" lIns="91425" spcFirstLastPara="1" rIns="91425" wrap="square" tIns="91425">
+              <a:noAutofit/>
+            </a:bodyPr>
+            <a:lstStyle/>
+            <a:p>
+              <a:pPr indent="0" lvl="0" marL="0" rtl="0" algn="l">
+                <a:spcBef>
+                  <a:spcPts val="0"/>
+                </a:spcBef>
+                <a:spcAft>
+                  <a:spcPts val="0"/>
+                </a:spcAft>
+                <a:buNone/>
+              </a:pPr>
+              <a:r>
+                <a:t/>
+              </a:r>
+              <a:endParaRPr/>
+            </a:p>
+          </p:txBody>
+        </p:sp>
+      </p:grpSp>
+    </p:spTree>
+  </p:cSld>
+  <p:clrMapOvr>
+    <a:masterClrMapping/>
+  </p:clrMapOvr>
+</p:sldLayout>
+</file>
+
+<file path=ppt/slideLayouts/slideLayout11.xml><?xml version="1.0" encoding="utf-8"?>
+<p:sldLayout xmlns:a="http://schemas.openxmlformats.org/drawingml/2006/main" xmlns:r="http://schemas.openxmlformats.org/officeDocument/2006/relationships" xmlns:mc="http://schemas.openxmlformats.org/markup-compatibility/2006" xmlns:mv="urn:schemas-microsoft-com:mac:vml" xmlns:p="http://schemas.openxmlformats.org/presentationml/2006/main" xmlns:c="http://schemas.openxmlformats.org/drawingml/2006/chart" xmlns:dgm="http://schemas.openxmlformats.org/drawingml/2006/diagram" xmlns:o="urn:schemas-microsoft-com:office:office" xmlns:v="urn:schemas-microsoft-com:vml" xmlns:pvml="urn:schemas-microsoft-com:office:powerpoint" xmlns:com="http://schemas.openxmlformats.org/drawingml/2006/compatibility" xmlns:p14="http://schemas.microsoft.com/office/powerpoint/2010/main" xmlns:p15="http://schemas.microsoft.com/office/powerpoint/2012/main" xmlns:ahyp="http://schemas.microsoft.com/office/drawing/2018/hyperlinkcolor" matchingName="Title only" type="titleOnly">
+  <p:cSld name="TITLE_ONLY">
+    <p:spTree>
+      <p:nvGrpSpPr>
+        <p:cNvPr id="81" name="Shape 81"/>
+        <p:cNvGrpSpPr/>
+        <p:nvPr/>
+      </p:nvGrpSpPr>
+      <p:grpSpPr>
+        <a:xfrm>
+          <a:off x="0" y="0"/>
+          <a:ext cx="0" cy="0"/>
+          <a:chOff x="0" y="0"/>
+          <a:chExt cx="0" cy="0"/>
+        </a:xfrm>
+      </p:grpSpPr>
+      <p:sp>
+        <p:nvSpPr>
+          <p:cNvPr id="82" name="Google Shape;82;p13"/>
+          <p:cNvSpPr txBox="1"/>
+          <p:nvPr>
+            <p:ph type="title"/>
+          </p:nvPr>
+        </p:nvSpPr>
+        <p:spPr>
+          <a:xfrm>
+            <a:off x="0" y="0"/>
+            <a:ext cx="9144000" cy="685800"/>
+          </a:xfrm>
+          <a:prstGeom prst="rect">
+            <a:avLst/>
+          </a:prstGeom>
+        </p:spPr>
+        <p:txBody>
+          <a:bodyPr anchorCtr="0" anchor="ctr" bIns="0" lIns="274300" spcFirstLastPara="1" rIns="0" wrap="square" tIns="0">
+            <a:noAutofit/>
+          </a:bodyPr>
+          <a:lstStyle>
+            <a:lvl1pPr lvl="0">
+              <a:spcBef>
+                <a:spcPts val="0"/>
+              </a:spcBef>
+              <a:spcAft>
+                <a:spcPts val="0"/>
+              </a:spcAft>
+              <a:buSzPts val="2400"/>
+              <a:buNone/>
+              <a:defRPr/>
+            </a:lvl1pPr>
+            <a:lvl2pPr lvl="1">
+              <a:spcBef>
+                <a:spcPts val="0"/>
+              </a:spcBef>
+              <a:spcAft>
+                <a:spcPts val="0"/>
+              </a:spcAft>
+              <a:buSzPts val="2800"/>
+              <a:buNone/>
+              <a:defRPr/>
+            </a:lvl2pPr>
+            <a:lvl3pPr lvl="2">
+              <a:spcBef>
+                <a:spcPts val="0"/>
+              </a:spcBef>
+              <a:spcAft>
+                <a:spcPts val="0"/>
+              </a:spcAft>
+              <a:buSzPts val="2800"/>
+              <a:buNone/>
+              <a:defRPr/>
+            </a:lvl3pPr>
+            <a:lvl4pPr lvl="3">
+              <a:spcBef>
+                <a:spcPts val="0"/>
+              </a:spcBef>
+              <a:spcAft>
+                <a:spcPts val="0"/>
+              </a:spcAft>
+              <a:buSzPts val="2800"/>
+              <a:buNone/>
+              <a:defRPr/>
+            </a:lvl4pPr>
+            <a:lvl5pPr lvl="4">
+              <a:spcBef>
+                <a:spcPts val="0"/>
+              </a:spcBef>
+              <a:spcAft>
+                <a:spcPts val="0"/>
+              </a:spcAft>
+              <a:buSzPts val="2800"/>
+              <a:buNone/>
+              <a:defRPr/>
+            </a:lvl5pPr>
+            <a:lvl6pPr lvl="5">
+              <a:spcBef>
+                <a:spcPts val="0"/>
+              </a:spcBef>
+              <a:spcAft>
+                <a:spcPts val="0"/>
+              </a:spcAft>
+              <a:buSzPts val="2800"/>
+              <a:buNone/>
+              <a:defRPr/>
+            </a:lvl6pPr>
+            <a:lvl7pPr lvl="6">
+              <a:spcBef>
+                <a:spcPts val="0"/>
+              </a:spcBef>
+              <a:spcAft>
+                <a:spcPts val="0"/>
+              </a:spcAft>
+              <a:buSzPts val="2800"/>
+              <a:buNone/>
+              <a:defRPr/>
+            </a:lvl7pPr>
+            <a:lvl8pPr lvl="7">
+              <a:spcBef>
+                <a:spcPts val="0"/>
+              </a:spcBef>
+              <a:spcAft>
+                <a:spcPts val="0"/>
+              </a:spcAft>
+              <a:buSzPts val="2800"/>
+              <a:buNone/>
+              <a:defRPr/>
+            </a:lvl8pPr>
+            <a:lvl9pPr lvl="8">
+              <a:spcBef>
+                <a:spcPts val="0"/>
+              </a:spcBef>
+              <a:spcAft>
+                <a:spcPts val="0"/>
+              </a:spcAft>
+              <a:buSzPts val="2800"/>
+              <a:buNone/>
+              <a:defRPr/>
+            </a:lvl9pPr>
+          </a:lstStyle>
+          <a:p/>
+        </p:txBody>
+      </p:sp>
+      <p:sp>
+        <p:nvSpPr>
+          <p:cNvPr id="83" name="Google Shape;83;p13"/>
+          <p:cNvSpPr txBox="1"/>
+          <p:nvPr>
+            <p:ph idx="12" type="sldNum"/>
+          </p:nvPr>
+        </p:nvSpPr>
+        <p:spPr>
+          <a:xfrm>
+            <a:off x="7315202" y="4416550"/>
+            <a:ext cx="1828800" cy="731400"/>
+          </a:xfrm>
+          <a:prstGeom prst="rect">
+            <a:avLst/>
+          </a:prstGeom>
+        </p:spPr>
+        <p:txBody>
+          <a:bodyPr anchorCtr="0" anchor="b" bIns="91425" lIns="91425" spcFirstLastPara="1" rIns="91425" wrap="square" tIns="91425">
+            <a:noAutofit/>
+          </a:bodyPr>
+          <a:lstStyle>
+            <a:lvl1pPr lvl="0" rtl="0">
+              <a:buNone/>
+              <a:defRPr>
+                <a:solidFill>
+                  <a:schemeClr val="dk1"/>
+                </a:solidFill>
+              </a:defRPr>
+            </a:lvl1pPr>
+            <a:lvl2pPr lvl="1" rtl="0">
+              <a:buNone/>
+              <a:defRPr>
+                <a:solidFill>
+                  <a:schemeClr val="dk1"/>
+                </a:solidFill>
+              </a:defRPr>
+            </a:lvl2pPr>
+            <a:lvl3pPr lvl="2" rtl="0">
+              <a:buNone/>
+              <a:defRPr>
+                <a:solidFill>
+                  <a:schemeClr val="dk1"/>
+                </a:solidFill>
+              </a:defRPr>
+            </a:lvl3pPr>
+            <a:lvl4pPr lvl="3" rtl="0">
+              <a:buNone/>
+              <a:defRPr>
+                <a:solidFill>
+                  <a:schemeClr val="dk1"/>
+                </a:solidFill>
+              </a:defRPr>
+            </a:lvl4pPr>
+            <a:lvl5pPr lvl="4" rtl="0">
+              <a:buNone/>
+              <a:defRPr>
+                <a:solidFill>
+                  <a:schemeClr val="dk1"/>
+                </a:solidFill>
+              </a:defRPr>
+            </a:lvl5pPr>
+            <a:lvl6pPr lvl="5" rtl="0">
+              <a:buNone/>
+              <a:defRPr>
+                <a:solidFill>
+                  <a:schemeClr val="dk1"/>
+                </a:solidFill>
+              </a:defRPr>
+            </a:lvl6pPr>
+            <a:lvl7pPr lvl="6" rtl="0">
+              <a:buNone/>
+              <a:defRPr>
+                <a:solidFill>
+                  <a:schemeClr val="dk1"/>
+                </a:solidFill>
+              </a:defRPr>
+            </a:lvl7pPr>
+            <a:lvl8pPr lvl="7" rtl="0">
+              <a:buNone/>
+              <a:defRPr>
+                <a:solidFill>
+                  <a:schemeClr val="dk1"/>
+                </a:solidFill>
+              </a:defRPr>
+            </a:lvl8pPr>
+            <a:lvl9pPr lvl="8" rtl="0">
+              <a:buNone/>
+              <a:defRPr>
+                <a:solidFill>
+                  <a:schemeClr val="dk1"/>
+                </a:solidFill>
+              </a:defRPr>
+            </a:lvl9pPr>
+          </a:lstStyle>
+          <a:p>
+            <a:pPr indent="0" lvl="0" marL="0" rtl="0" algn="r">
+              <a:spcBef>
+                <a:spcPts val="0"/>
+              </a:spcBef>
+              <a:spcAft>
+                <a:spcPts val="0"/>
+              </a:spcAft>
+              <a:buNone/>
+            </a:pPr>
+            <a:fld id="{00000000-1234-1234-1234-123412341234}" type="slidenum">
+              <a:rPr lang="en"/>
+              <a:t>‹#›</a:t>
+            </a:fld>
+            <a:endParaRPr/>
+          </a:p>
+          <a:p>
+            <a:pPr indent="0" lvl="0" marL="0" rtl="0" algn="r">
+              <a:spcBef>
+                <a:spcPts val="0"/>
+              </a:spcBef>
+              <a:spcAft>
+                <a:spcPts val="0"/>
+              </a:spcAft>
+              <a:buNone/>
+            </a:pPr>
+            <a:r>
+              <a:rPr b="0" lang="en" sz="900" u="sng">
+                <a:solidFill>
+                  <a:schemeClr val="hlink"/>
+                </a:solidFill>
+                <a:hlinkClick r:id="rId2"/>
+              </a:rPr>
+              <a:t>https://uni1.de/amos</a:t>
+            </a:r>
+            <a:r>
+              <a:rPr b="0" lang="en" sz="900">
+                <a:solidFill>
+                  <a:schemeClr val="dk2"/>
+                </a:solidFill>
+              </a:rPr>
+              <a:t> </a:t>
+            </a:r>
+            <a:endParaRPr>
+              <a:solidFill>
+                <a:schemeClr val="dk2"/>
+              </a:solidFill>
+            </a:endParaRPr>
+          </a:p>
+        </p:txBody>
+      </p:sp>
+      <p:grpSp>
+        <p:nvGrpSpPr>
+          <p:cNvPr id="84" name="Google Shape;84;p13"/>
+          <p:cNvGrpSpPr/>
+          <p:nvPr/>
+        </p:nvGrpSpPr>
+        <p:grpSpPr>
+          <a:xfrm>
+            <a:off x="0" y="685800"/>
+            <a:ext cx="9144000" cy="91500"/>
+            <a:chOff x="0" y="2386584"/>
+            <a:chExt cx="9144000" cy="91500"/>
+          </a:xfrm>
+        </p:grpSpPr>
+        <p:sp>
+          <p:nvSpPr>
+            <p:cNvPr id="85" name="Google Shape;85;p13"/>
+            <p:cNvSpPr/>
+            <p:nvPr/>
+          </p:nvSpPr>
+          <p:spPr>
+            <a:xfrm>
+              <a:off x="0" y="2386584"/>
+              <a:ext cx="914400" cy="91500"/>
+            </a:xfrm>
+            <a:prstGeom prst="rect">
+              <a:avLst/>
+            </a:prstGeom>
+            <a:solidFill>
+              <a:schemeClr val="accent2"/>
+            </a:solidFill>
+            <a:ln>
+              <a:noFill/>
+            </a:ln>
+          </p:spPr>
+          <p:txBody>
+            <a:bodyPr anchorCtr="0" anchor="ctr" bIns="91425" lIns="91425" spcFirstLastPara="1" rIns="91425" wrap="square" tIns="91425">
+              <a:noAutofit/>
+            </a:bodyPr>
+            <a:lstStyle/>
+            <a:p>
+              <a:pPr indent="0" lvl="0" marL="0" rtl="0" algn="l">
+                <a:spcBef>
+                  <a:spcPts val="0"/>
+                </a:spcBef>
+                <a:spcAft>
+                  <a:spcPts val="0"/>
+                </a:spcAft>
+                <a:buNone/>
+              </a:pPr>
+              <a:r>
+                <a:t/>
+              </a:r>
+              <a:endParaRPr/>
+            </a:p>
+          </p:txBody>
+        </p:sp>
+        <p:sp>
+          <p:nvSpPr>
+            <p:cNvPr id="86" name="Google Shape;86;p13"/>
+            <p:cNvSpPr/>
+            <p:nvPr/>
+          </p:nvSpPr>
+          <p:spPr>
+            <a:xfrm>
+              <a:off x="914400" y="2386584"/>
+              <a:ext cx="1828800" cy="91500"/>
+            </a:xfrm>
+            <a:prstGeom prst="rect">
+              <a:avLst/>
+            </a:prstGeom>
+            <a:solidFill>
+              <a:schemeClr val="accent3"/>
+            </a:solidFill>
+            <a:ln>
+              <a:noFill/>
+            </a:ln>
+          </p:spPr>
+          <p:txBody>
+            <a:bodyPr anchorCtr="0" anchor="ctr" bIns="91425" lIns="91425" spcFirstLastPara="1" rIns="91425" wrap="square" tIns="91425">
+              <a:noAutofit/>
+            </a:bodyPr>
+            <a:lstStyle/>
+            <a:p>
+              <a:pPr indent="0" lvl="0" marL="0" rtl="0" algn="l">
+                <a:spcBef>
+                  <a:spcPts val="0"/>
+                </a:spcBef>
+                <a:spcAft>
+                  <a:spcPts val="0"/>
+                </a:spcAft>
+                <a:buNone/>
+              </a:pPr>
+              <a:r>
+                <a:t/>
+              </a:r>
+              <a:endParaRPr/>
+            </a:p>
+          </p:txBody>
+        </p:sp>
+        <p:sp>
+          <p:nvSpPr>
+            <p:cNvPr id="87" name="Google Shape;87;p13"/>
+            <p:cNvSpPr/>
+            <p:nvPr/>
+          </p:nvSpPr>
+          <p:spPr>
+            <a:xfrm>
+              <a:off x="2743200" y="2386584"/>
+              <a:ext cx="6400800" cy="91500"/>
+            </a:xfrm>
+            <a:prstGeom prst="rect">
+              <a:avLst/>
+            </a:prstGeom>
+            <a:solidFill>
+              <a:schemeClr val="accent4"/>
+            </a:solidFill>
+            <a:ln>
+              <a:noFill/>
+            </a:ln>
+          </p:spPr>
+          <p:txBody>
+            <a:bodyPr anchorCtr="0" anchor="ctr" bIns="91425" lIns="91425" spcFirstLastPara="1" rIns="91425" wrap="square" tIns="91425">
+              <a:noAutofit/>
+            </a:bodyPr>
+            <a:lstStyle/>
+            <a:p>
+              <a:pPr indent="0" lvl="0" marL="0" rtl="0" algn="l">
+                <a:spcBef>
+                  <a:spcPts val="0"/>
+                </a:spcBef>
+                <a:spcAft>
+                  <a:spcPts val="0"/>
+                </a:spcAft>
+                <a:buNone/>
+              </a:pPr>
+              <a:r>
+                <a:t/>
+              </a:r>
+              <a:endParaRPr/>
+            </a:p>
+          </p:txBody>
+        </p:sp>
+      </p:grpSp>
+    </p:spTree>
+  </p:cSld>
+  <p:clrMapOvr>
+    <a:masterClrMapping/>
+  </p:clrMapOvr>
+</p:sldLayout>
+</file>
+
+<file path=ppt/slideLayouts/slideLayout12.xml><?xml version="1.0" encoding="utf-8"?>
+<p:sldLayout xmlns:a="http://schemas.openxmlformats.org/drawingml/2006/main" xmlns:r="http://schemas.openxmlformats.org/officeDocument/2006/relationships" xmlns:mc="http://schemas.openxmlformats.org/markup-compatibility/2006" xmlns:mv="urn:schemas-microsoft-com:mac:vml" xmlns:p="http://schemas.openxmlformats.org/presentationml/2006/main" xmlns:c="http://schemas.openxmlformats.org/drawingml/2006/chart" xmlns:dgm="http://schemas.openxmlformats.org/drawingml/2006/diagram" xmlns:o="urn:schemas-microsoft-com:office:office" xmlns:v="urn:schemas-microsoft-com:vml" xmlns:pvml="urn:schemas-microsoft-com:office:powerpoint" xmlns:com="http://schemas.openxmlformats.org/drawingml/2006/compatibility" xmlns:p14="http://schemas.microsoft.com/office/powerpoint/2010/main" xmlns:p15="http://schemas.microsoft.com/office/powerpoint/2012/main" xmlns:ahyp="http://schemas.microsoft.com/office/drawing/2018/hyperlinkcolor" matchingName="Blank" type="blank">
+  <p:cSld name="BLANK">
+    <p:spTree>
+      <p:nvGrpSpPr>
+        <p:cNvPr id="88" name="Shape 88"/>
+        <p:cNvGrpSpPr/>
+        <p:nvPr/>
+      </p:nvGrpSpPr>
+      <p:grpSpPr>
+        <a:xfrm>
+          <a:off x="0" y="0"/>
+          <a:ext cx="0" cy="0"/>
+          <a:chOff x="0" y="0"/>
+          <a:chExt cx="0" cy="0"/>
+        </a:xfrm>
+      </p:grpSpPr>
     </p:spTree>
   </p:cSld>
   <p:clrMapOvr>
@@ -5345,6 +6509,1319 @@
           <a:chExt cx="0" cy="0"/>
         </a:xfrm>
       </p:grpSpPr>
+    </p:spTree>
+  </p:cSld>
+  <p:clrMapOvr>
+    <a:masterClrMapping/>
+  </p:clrMapOvr>
+</p:sldLayout>
+</file>
+
+<file path=ppt/slideLayouts/slideLayout7.xml><?xml version="1.0" encoding="utf-8"?>
+<p:sldLayout xmlns:a="http://schemas.openxmlformats.org/drawingml/2006/main" xmlns:r="http://schemas.openxmlformats.org/officeDocument/2006/relationships" xmlns:mc="http://schemas.openxmlformats.org/markup-compatibility/2006" xmlns:mv="urn:schemas-microsoft-com:mac:vml" xmlns:p="http://schemas.openxmlformats.org/presentationml/2006/main" xmlns:c="http://schemas.openxmlformats.org/drawingml/2006/chart" xmlns:dgm="http://schemas.openxmlformats.org/drawingml/2006/diagram" xmlns:o="urn:schemas-microsoft-com:office:office" xmlns:v="urn:schemas-microsoft-com:vml" xmlns:pvml="urn:schemas-microsoft-com:office:powerpoint" xmlns:com="http://schemas.openxmlformats.org/drawingml/2006/compatibility" xmlns:p14="http://schemas.microsoft.com/office/powerpoint/2010/main" xmlns:p15="http://schemas.microsoft.com/office/powerpoint/2012/main" xmlns:ahyp="http://schemas.microsoft.com/office/drawing/2018/hyperlinkcolor" matchingName="Title slide" type="title">
+  <p:cSld name="TITLE">
+    <p:spTree>
+      <p:nvGrpSpPr>
+        <p:cNvPr id="51" name="Shape 51"/>
+        <p:cNvGrpSpPr/>
+        <p:nvPr/>
+      </p:nvGrpSpPr>
+      <p:grpSpPr>
+        <a:xfrm>
+          <a:off x="0" y="0"/>
+          <a:ext cx="0" cy="0"/>
+          <a:chOff x="0" y="0"/>
+          <a:chExt cx="0" cy="0"/>
+        </a:xfrm>
+      </p:grpSpPr>
+      <p:sp>
+        <p:nvSpPr>
+          <p:cNvPr id="52" name="Google Shape;52;p9"/>
+          <p:cNvSpPr txBox="1"/>
+          <p:nvPr>
+            <p:ph type="ctrTitle"/>
+          </p:nvPr>
+        </p:nvSpPr>
+        <p:spPr>
+          <a:xfrm>
+            <a:off x="0" y="0"/>
+            <a:ext cx="9144000" cy="2388900"/>
+          </a:xfrm>
+          <a:prstGeom prst="rect">
+            <a:avLst/>
+          </a:prstGeom>
+          <a:noFill/>
+        </p:spPr>
+        <p:txBody>
+          <a:bodyPr anchorCtr="0" anchor="b" bIns="274300" lIns="91425" spcFirstLastPara="1" rIns="91425" wrap="square" tIns="91425">
+            <a:noAutofit/>
+          </a:bodyPr>
+          <a:lstStyle>
+            <a:lvl1pPr lvl="0" algn="ctr">
+              <a:spcBef>
+                <a:spcPts val="0"/>
+              </a:spcBef>
+              <a:spcAft>
+                <a:spcPts val="0"/>
+              </a:spcAft>
+              <a:buClr>
+                <a:schemeClr val="dk1"/>
+              </a:buClr>
+              <a:buSzPts val="4200"/>
+              <a:buNone/>
+              <a:defRPr sz="4200">
+                <a:solidFill>
+                  <a:schemeClr val="dk1"/>
+                </a:solidFill>
+              </a:defRPr>
+            </a:lvl1pPr>
+            <a:lvl2pPr lvl="1" algn="ctr">
+              <a:spcBef>
+                <a:spcPts val="0"/>
+              </a:spcBef>
+              <a:spcAft>
+                <a:spcPts val="0"/>
+              </a:spcAft>
+              <a:buSzPts val="5200"/>
+              <a:buNone/>
+              <a:defRPr sz="5200"/>
+            </a:lvl2pPr>
+            <a:lvl3pPr lvl="2" algn="ctr">
+              <a:spcBef>
+                <a:spcPts val="0"/>
+              </a:spcBef>
+              <a:spcAft>
+                <a:spcPts val="0"/>
+              </a:spcAft>
+              <a:buSzPts val="5200"/>
+              <a:buNone/>
+              <a:defRPr sz="5200"/>
+            </a:lvl3pPr>
+            <a:lvl4pPr lvl="3" algn="ctr">
+              <a:spcBef>
+                <a:spcPts val="0"/>
+              </a:spcBef>
+              <a:spcAft>
+                <a:spcPts val="0"/>
+              </a:spcAft>
+              <a:buSzPts val="5200"/>
+              <a:buNone/>
+              <a:defRPr sz="5200"/>
+            </a:lvl4pPr>
+            <a:lvl5pPr lvl="4" algn="ctr">
+              <a:spcBef>
+                <a:spcPts val="0"/>
+              </a:spcBef>
+              <a:spcAft>
+                <a:spcPts val="0"/>
+              </a:spcAft>
+              <a:buSzPts val="5200"/>
+              <a:buNone/>
+              <a:defRPr sz="5200"/>
+            </a:lvl5pPr>
+            <a:lvl6pPr lvl="5" algn="ctr">
+              <a:spcBef>
+                <a:spcPts val="0"/>
+              </a:spcBef>
+              <a:spcAft>
+                <a:spcPts val="0"/>
+              </a:spcAft>
+              <a:buSzPts val="5200"/>
+              <a:buNone/>
+              <a:defRPr sz="5200"/>
+            </a:lvl6pPr>
+            <a:lvl7pPr lvl="6" algn="ctr">
+              <a:spcBef>
+                <a:spcPts val="0"/>
+              </a:spcBef>
+              <a:spcAft>
+                <a:spcPts val="0"/>
+              </a:spcAft>
+              <a:buSzPts val="5200"/>
+              <a:buNone/>
+              <a:defRPr sz="5200"/>
+            </a:lvl7pPr>
+            <a:lvl8pPr lvl="7" algn="ctr">
+              <a:spcBef>
+                <a:spcPts val="0"/>
+              </a:spcBef>
+              <a:spcAft>
+                <a:spcPts val="0"/>
+              </a:spcAft>
+              <a:buSzPts val="5200"/>
+              <a:buNone/>
+              <a:defRPr sz="5200"/>
+            </a:lvl8pPr>
+            <a:lvl9pPr lvl="8" algn="ctr">
+              <a:spcBef>
+                <a:spcPts val="0"/>
+              </a:spcBef>
+              <a:spcAft>
+                <a:spcPts val="0"/>
+              </a:spcAft>
+              <a:buSzPts val="5200"/>
+              <a:buNone/>
+              <a:defRPr sz="5200"/>
+            </a:lvl9pPr>
+          </a:lstStyle>
+          <a:p/>
+        </p:txBody>
+      </p:sp>
+      <p:sp>
+        <p:nvSpPr>
+          <p:cNvPr id="53" name="Google Shape;53;p9"/>
+          <p:cNvSpPr txBox="1"/>
+          <p:nvPr>
+            <p:ph idx="1" type="subTitle"/>
+          </p:nvPr>
+        </p:nvSpPr>
+        <p:spPr>
+          <a:xfrm>
+            <a:off x="0" y="2569475"/>
+            <a:ext cx="9144000" cy="2574000"/>
+          </a:xfrm>
+          <a:prstGeom prst="rect">
+            <a:avLst/>
+          </a:prstGeom>
+        </p:spPr>
+        <p:txBody>
+          <a:bodyPr anchorCtr="0" anchor="t" bIns="91425" lIns="91425" spcFirstLastPara="1" rIns="91425" wrap="square" tIns="274300">
+            <a:noAutofit/>
+          </a:bodyPr>
+          <a:lstStyle>
+            <a:lvl1pPr lvl="0" algn="ctr">
+              <a:lnSpc>
+                <a:spcPct val="115000"/>
+              </a:lnSpc>
+              <a:spcBef>
+                <a:spcPts val="0"/>
+              </a:spcBef>
+              <a:spcAft>
+                <a:spcPts val="0"/>
+              </a:spcAft>
+              <a:buSzPts val="3000"/>
+              <a:buNone/>
+              <a:defRPr sz="3000"/>
+            </a:lvl1pPr>
+            <a:lvl2pPr lvl="1" algn="ctr">
+              <a:lnSpc>
+                <a:spcPct val="115000"/>
+              </a:lnSpc>
+              <a:spcBef>
+                <a:spcPts val="0"/>
+              </a:spcBef>
+              <a:spcAft>
+                <a:spcPts val="0"/>
+              </a:spcAft>
+              <a:buSzPts val="3200"/>
+              <a:buNone/>
+              <a:defRPr sz="3200"/>
+            </a:lvl2pPr>
+            <a:lvl3pPr lvl="2" algn="ctr">
+              <a:lnSpc>
+                <a:spcPct val="115000"/>
+              </a:lnSpc>
+              <a:spcBef>
+                <a:spcPts val="0"/>
+              </a:spcBef>
+              <a:spcAft>
+                <a:spcPts val="0"/>
+              </a:spcAft>
+              <a:buSzPts val="3200"/>
+              <a:buNone/>
+              <a:defRPr sz="3200"/>
+            </a:lvl3pPr>
+            <a:lvl4pPr lvl="3" algn="ctr">
+              <a:lnSpc>
+                <a:spcPct val="115000"/>
+              </a:lnSpc>
+              <a:spcBef>
+                <a:spcPts val="0"/>
+              </a:spcBef>
+              <a:spcAft>
+                <a:spcPts val="0"/>
+              </a:spcAft>
+              <a:buSzPts val="3200"/>
+              <a:buNone/>
+              <a:defRPr sz="3200"/>
+            </a:lvl4pPr>
+            <a:lvl5pPr lvl="4" algn="ctr">
+              <a:lnSpc>
+                <a:spcPct val="115000"/>
+              </a:lnSpc>
+              <a:spcBef>
+                <a:spcPts val="0"/>
+              </a:spcBef>
+              <a:spcAft>
+                <a:spcPts val="0"/>
+              </a:spcAft>
+              <a:buSzPts val="3200"/>
+              <a:buNone/>
+              <a:defRPr sz="3200"/>
+            </a:lvl5pPr>
+            <a:lvl6pPr lvl="5" algn="ctr">
+              <a:lnSpc>
+                <a:spcPct val="115000"/>
+              </a:lnSpc>
+              <a:spcBef>
+                <a:spcPts val="0"/>
+              </a:spcBef>
+              <a:spcAft>
+                <a:spcPts val="0"/>
+              </a:spcAft>
+              <a:buSzPts val="3200"/>
+              <a:buNone/>
+              <a:defRPr sz="3200"/>
+            </a:lvl6pPr>
+            <a:lvl7pPr lvl="6" algn="ctr">
+              <a:lnSpc>
+                <a:spcPct val="115000"/>
+              </a:lnSpc>
+              <a:spcBef>
+                <a:spcPts val="0"/>
+              </a:spcBef>
+              <a:spcAft>
+                <a:spcPts val="0"/>
+              </a:spcAft>
+              <a:buSzPts val="3200"/>
+              <a:buNone/>
+              <a:defRPr sz="3200"/>
+            </a:lvl7pPr>
+            <a:lvl8pPr lvl="7" algn="ctr">
+              <a:lnSpc>
+                <a:spcPct val="115000"/>
+              </a:lnSpc>
+              <a:spcBef>
+                <a:spcPts val="0"/>
+              </a:spcBef>
+              <a:spcAft>
+                <a:spcPts val="0"/>
+              </a:spcAft>
+              <a:buSzPts val="3200"/>
+              <a:buNone/>
+              <a:defRPr sz="3200"/>
+            </a:lvl8pPr>
+            <a:lvl9pPr lvl="8" algn="ctr">
+              <a:lnSpc>
+                <a:spcPct val="115000"/>
+              </a:lnSpc>
+              <a:spcBef>
+                <a:spcPts val="0"/>
+              </a:spcBef>
+              <a:spcAft>
+                <a:spcPts val="0"/>
+              </a:spcAft>
+              <a:buSzPts val="3200"/>
+              <a:buNone/>
+              <a:defRPr sz="3200"/>
+            </a:lvl9pPr>
+          </a:lstStyle>
+          <a:p/>
+        </p:txBody>
+      </p:sp>
+      <p:grpSp>
+        <p:nvGrpSpPr>
+          <p:cNvPr id="54" name="Google Shape;54;p9"/>
+          <p:cNvGrpSpPr/>
+          <p:nvPr/>
+        </p:nvGrpSpPr>
+        <p:grpSpPr>
+          <a:xfrm>
+            <a:off x="0" y="2388810"/>
+            <a:ext cx="9144000" cy="183000"/>
+            <a:chOff x="0" y="2388810"/>
+            <a:chExt cx="9144000" cy="183000"/>
+          </a:xfrm>
+        </p:grpSpPr>
+        <p:sp>
+          <p:nvSpPr>
+            <p:cNvPr id="55" name="Google Shape;55;p9"/>
+            <p:cNvSpPr/>
+            <p:nvPr/>
+          </p:nvSpPr>
+          <p:spPr>
+            <a:xfrm>
+              <a:off x="0" y="2388810"/>
+              <a:ext cx="914400" cy="183000"/>
+            </a:xfrm>
+            <a:prstGeom prst="rect">
+              <a:avLst/>
+            </a:prstGeom>
+            <a:solidFill>
+              <a:schemeClr val="accent2"/>
+            </a:solidFill>
+            <a:ln>
+              <a:noFill/>
+            </a:ln>
+          </p:spPr>
+          <p:txBody>
+            <a:bodyPr anchorCtr="0" anchor="ctr" bIns="91425" lIns="91425" spcFirstLastPara="1" rIns="91425" wrap="square" tIns="91425">
+              <a:noAutofit/>
+            </a:bodyPr>
+            <a:lstStyle/>
+            <a:p>
+              <a:pPr indent="0" lvl="0" marL="0" rtl="0" algn="l">
+                <a:spcBef>
+                  <a:spcPts val="0"/>
+                </a:spcBef>
+                <a:spcAft>
+                  <a:spcPts val="0"/>
+                </a:spcAft>
+                <a:buNone/>
+              </a:pPr>
+              <a:r>
+                <a:t/>
+              </a:r>
+              <a:endParaRPr/>
+            </a:p>
+          </p:txBody>
+        </p:sp>
+        <p:sp>
+          <p:nvSpPr>
+            <p:cNvPr id="56" name="Google Shape;56;p9"/>
+            <p:cNvSpPr/>
+            <p:nvPr/>
+          </p:nvSpPr>
+          <p:spPr>
+            <a:xfrm>
+              <a:off x="914400" y="2388810"/>
+              <a:ext cx="1828800" cy="183000"/>
+            </a:xfrm>
+            <a:prstGeom prst="rect">
+              <a:avLst/>
+            </a:prstGeom>
+            <a:solidFill>
+              <a:schemeClr val="accent3"/>
+            </a:solidFill>
+            <a:ln>
+              <a:noFill/>
+            </a:ln>
+          </p:spPr>
+          <p:txBody>
+            <a:bodyPr anchorCtr="0" anchor="ctr" bIns="91425" lIns="91425" spcFirstLastPara="1" rIns="91425" wrap="square" tIns="91425">
+              <a:noAutofit/>
+            </a:bodyPr>
+            <a:lstStyle/>
+            <a:p>
+              <a:pPr indent="0" lvl="0" marL="0" rtl="0" algn="l">
+                <a:spcBef>
+                  <a:spcPts val="0"/>
+                </a:spcBef>
+                <a:spcAft>
+                  <a:spcPts val="0"/>
+                </a:spcAft>
+                <a:buNone/>
+              </a:pPr>
+              <a:r>
+                <a:t/>
+              </a:r>
+              <a:endParaRPr/>
+            </a:p>
+          </p:txBody>
+        </p:sp>
+        <p:sp>
+          <p:nvSpPr>
+            <p:cNvPr id="57" name="Google Shape;57;p9"/>
+            <p:cNvSpPr/>
+            <p:nvPr/>
+          </p:nvSpPr>
+          <p:spPr>
+            <a:xfrm>
+              <a:off x="2743200" y="2388810"/>
+              <a:ext cx="6400800" cy="183000"/>
+            </a:xfrm>
+            <a:prstGeom prst="rect">
+              <a:avLst/>
+            </a:prstGeom>
+            <a:solidFill>
+              <a:schemeClr val="accent4"/>
+            </a:solidFill>
+            <a:ln>
+              <a:noFill/>
+            </a:ln>
+          </p:spPr>
+          <p:txBody>
+            <a:bodyPr anchorCtr="0" anchor="ctr" bIns="91425" lIns="91425" spcFirstLastPara="1" rIns="91425" wrap="square" tIns="91425">
+              <a:noAutofit/>
+            </a:bodyPr>
+            <a:lstStyle/>
+            <a:p>
+              <a:pPr indent="0" lvl="0" marL="0" rtl="0" algn="l">
+                <a:spcBef>
+                  <a:spcPts val="0"/>
+                </a:spcBef>
+                <a:spcAft>
+                  <a:spcPts val="0"/>
+                </a:spcAft>
+                <a:buNone/>
+              </a:pPr>
+              <a:r>
+                <a:t/>
+              </a:r>
+              <a:endParaRPr/>
+            </a:p>
+          </p:txBody>
+        </p:sp>
+      </p:grpSp>
+    </p:spTree>
+  </p:cSld>
+  <p:clrMapOvr>
+    <a:masterClrMapping/>
+  </p:clrMapOvr>
+</p:sldLayout>
+</file>
+
+<file path=ppt/slideLayouts/slideLayout8.xml><?xml version="1.0" encoding="utf-8"?>
+<p:sldLayout xmlns:a="http://schemas.openxmlformats.org/drawingml/2006/main" xmlns:r="http://schemas.openxmlformats.org/officeDocument/2006/relationships" xmlns:mc="http://schemas.openxmlformats.org/markup-compatibility/2006" xmlns:mv="urn:schemas-microsoft-com:mac:vml" xmlns:p="http://schemas.openxmlformats.org/presentationml/2006/main" xmlns:c="http://schemas.openxmlformats.org/drawingml/2006/chart" xmlns:dgm="http://schemas.openxmlformats.org/drawingml/2006/diagram" xmlns:o="urn:schemas-microsoft-com:office:office" xmlns:v="urn:schemas-microsoft-com:vml" xmlns:pvml="urn:schemas-microsoft-com:office:powerpoint" xmlns:com="http://schemas.openxmlformats.org/drawingml/2006/compatibility" xmlns:p14="http://schemas.microsoft.com/office/powerpoint/2010/main" xmlns:p15="http://schemas.microsoft.com/office/powerpoint/2012/main" xmlns:ahyp="http://schemas.microsoft.com/office/drawing/2018/hyperlinkcolor" matchingName="Section header" type="secHead">
+  <p:cSld name="SECTION_HEADER">
+    <p:spTree>
+      <p:nvGrpSpPr>
+        <p:cNvPr id="58" name="Shape 58"/>
+        <p:cNvGrpSpPr/>
+        <p:nvPr/>
+      </p:nvGrpSpPr>
+      <p:grpSpPr>
+        <a:xfrm>
+          <a:off x="0" y="0"/>
+          <a:ext cx="0" cy="0"/>
+          <a:chOff x="0" y="0"/>
+          <a:chExt cx="0" cy="0"/>
+        </a:xfrm>
+      </p:grpSpPr>
+      <p:sp>
+        <p:nvSpPr>
+          <p:cNvPr id="59" name="Google Shape;59;p10"/>
+          <p:cNvSpPr txBox="1"/>
+          <p:nvPr>
+            <p:ph type="title"/>
+          </p:nvPr>
+        </p:nvSpPr>
+        <p:spPr>
+          <a:xfrm>
+            <a:off x="0" y="-7"/>
+            <a:ext cx="9144000" cy="2386500"/>
+          </a:xfrm>
+          <a:prstGeom prst="rect">
+            <a:avLst/>
+          </a:prstGeom>
+        </p:spPr>
+        <p:txBody>
+          <a:bodyPr anchorCtr="0" anchor="b" bIns="274300" lIns="91425" spcFirstLastPara="1" rIns="91425" wrap="square" tIns="91425">
+            <a:noAutofit/>
+          </a:bodyPr>
+          <a:lstStyle>
+            <a:lvl1pPr lvl="0" algn="ctr">
+              <a:spcBef>
+                <a:spcPts val="0"/>
+              </a:spcBef>
+              <a:spcAft>
+                <a:spcPts val="0"/>
+              </a:spcAft>
+              <a:buSzPts val="3000"/>
+              <a:buNone/>
+              <a:defRPr sz="3000"/>
+            </a:lvl1pPr>
+            <a:lvl2pPr lvl="1" algn="ctr">
+              <a:spcBef>
+                <a:spcPts val="0"/>
+              </a:spcBef>
+              <a:spcAft>
+                <a:spcPts val="0"/>
+              </a:spcAft>
+              <a:buSzPts val="3600"/>
+              <a:buNone/>
+              <a:defRPr sz="3600"/>
+            </a:lvl2pPr>
+            <a:lvl3pPr lvl="2" algn="ctr">
+              <a:spcBef>
+                <a:spcPts val="0"/>
+              </a:spcBef>
+              <a:spcAft>
+                <a:spcPts val="0"/>
+              </a:spcAft>
+              <a:buSzPts val="3600"/>
+              <a:buNone/>
+              <a:defRPr sz="3600"/>
+            </a:lvl3pPr>
+            <a:lvl4pPr lvl="3" algn="ctr">
+              <a:spcBef>
+                <a:spcPts val="0"/>
+              </a:spcBef>
+              <a:spcAft>
+                <a:spcPts val="0"/>
+              </a:spcAft>
+              <a:buSzPts val="3600"/>
+              <a:buNone/>
+              <a:defRPr sz="3600"/>
+            </a:lvl4pPr>
+            <a:lvl5pPr lvl="4" algn="ctr">
+              <a:spcBef>
+                <a:spcPts val="0"/>
+              </a:spcBef>
+              <a:spcAft>
+                <a:spcPts val="0"/>
+              </a:spcAft>
+              <a:buSzPts val="3600"/>
+              <a:buNone/>
+              <a:defRPr sz="3600"/>
+            </a:lvl5pPr>
+            <a:lvl6pPr lvl="5" algn="ctr">
+              <a:spcBef>
+                <a:spcPts val="0"/>
+              </a:spcBef>
+              <a:spcAft>
+                <a:spcPts val="0"/>
+              </a:spcAft>
+              <a:buSzPts val="3600"/>
+              <a:buNone/>
+              <a:defRPr sz="3600"/>
+            </a:lvl6pPr>
+            <a:lvl7pPr lvl="6" algn="ctr">
+              <a:spcBef>
+                <a:spcPts val="0"/>
+              </a:spcBef>
+              <a:spcAft>
+                <a:spcPts val="0"/>
+              </a:spcAft>
+              <a:buSzPts val="3600"/>
+              <a:buNone/>
+              <a:defRPr sz="3600"/>
+            </a:lvl7pPr>
+            <a:lvl8pPr lvl="7" algn="ctr">
+              <a:spcBef>
+                <a:spcPts val="0"/>
+              </a:spcBef>
+              <a:spcAft>
+                <a:spcPts val="0"/>
+              </a:spcAft>
+              <a:buSzPts val="3600"/>
+              <a:buNone/>
+              <a:defRPr sz="3600"/>
+            </a:lvl8pPr>
+            <a:lvl9pPr lvl="8" algn="ctr">
+              <a:spcBef>
+                <a:spcPts val="0"/>
+              </a:spcBef>
+              <a:spcAft>
+                <a:spcPts val="0"/>
+              </a:spcAft>
+              <a:buSzPts val="3600"/>
+              <a:buNone/>
+              <a:defRPr sz="3600"/>
+            </a:lvl9pPr>
+          </a:lstStyle>
+          <a:p/>
+        </p:txBody>
+      </p:sp>
+      <p:grpSp>
+        <p:nvGrpSpPr>
+          <p:cNvPr id="60" name="Google Shape;60;p10"/>
+          <p:cNvGrpSpPr/>
+          <p:nvPr/>
+        </p:nvGrpSpPr>
+        <p:grpSpPr>
+          <a:xfrm>
+            <a:off x="0" y="2432304"/>
+            <a:ext cx="9144000" cy="91500"/>
+            <a:chOff x="0" y="2386584"/>
+            <a:chExt cx="9144000" cy="91500"/>
+          </a:xfrm>
+        </p:grpSpPr>
+        <p:sp>
+          <p:nvSpPr>
+            <p:cNvPr id="61" name="Google Shape;61;p10"/>
+            <p:cNvSpPr/>
+            <p:nvPr/>
+          </p:nvSpPr>
+          <p:spPr>
+            <a:xfrm>
+              <a:off x="0" y="2386584"/>
+              <a:ext cx="914400" cy="91500"/>
+            </a:xfrm>
+            <a:prstGeom prst="rect">
+              <a:avLst/>
+            </a:prstGeom>
+            <a:solidFill>
+              <a:schemeClr val="accent2"/>
+            </a:solidFill>
+            <a:ln>
+              <a:noFill/>
+            </a:ln>
+          </p:spPr>
+          <p:txBody>
+            <a:bodyPr anchorCtr="0" anchor="ctr" bIns="91425" lIns="91425" spcFirstLastPara="1" rIns="91425" wrap="square" tIns="91425">
+              <a:noAutofit/>
+            </a:bodyPr>
+            <a:lstStyle/>
+            <a:p>
+              <a:pPr indent="0" lvl="0" marL="0" rtl="0" algn="l">
+                <a:spcBef>
+                  <a:spcPts val="0"/>
+                </a:spcBef>
+                <a:spcAft>
+                  <a:spcPts val="0"/>
+                </a:spcAft>
+                <a:buNone/>
+              </a:pPr>
+              <a:r>
+                <a:t/>
+              </a:r>
+              <a:endParaRPr/>
+            </a:p>
+          </p:txBody>
+        </p:sp>
+        <p:sp>
+          <p:nvSpPr>
+            <p:cNvPr id="62" name="Google Shape;62;p10"/>
+            <p:cNvSpPr/>
+            <p:nvPr/>
+          </p:nvSpPr>
+          <p:spPr>
+            <a:xfrm>
+              <a:off x="914400" y="2386584"/>
+              <a:ext cx="1828800" cy="91500"/>
+            </a:xfrm>
+            <a:prstGeom prst="rect">
+              <a:avLst/>
+            </a:prstGeom>
+            <a:solidFill>
+              <a:schemeClr val="accent3"/>
+            </a:solidFill>
+            <a:ln>
+              <a:noFill/>
+            </a:ln>
+          </p:spPr>
+          <p:txBody>
+            <a:bodyPr anchorCtr="0" anchor="ctr" bIns="91425" lIns="91425" spcFirstLastPara="1" rIns="91425" wrap="square" tIns="91425">
+              <a:noAutofit/>
+            </a:bodyPr>
+            <a:lstStyle/>
+            <a:p>
+              <a:pPr indent="0" lvl="0" marL="0" rtl="0" algn="l">
+                <a:spcBef>
+                  <a:spcPts val="0"/>
+                </a:spcBef>
+                <a:spcAft>
+                  <a:spcPts val="0"/>
+                </a:spcAft>
+                <a:buNone/>
+              </a:pPr>
+              <a:r>
+                <a:t/>
+              </a:r>
+              <a:endParaRPr/>
+            </a:p>
+          </p:txBody>
+        </p:sp>
+        <p:sp>
+          <p:nvSpPr>
+            <p:cNvPr id="63" name="Google Shape;63;p10"/>
+            <p:cNvSpPr/>
+            <p:nvPr/>
+          </p:nvSpPr>
+          <p:spPr>
+            <a:xfrm>
+              <a:off x="2743200" y="2386584"/>
+              <a:ext cx="6400800" cy="91500"/>
+            </a:xfrm>
+            <a:prstGeom prst="rect">
+              <a:avLst/>
+            </a:prstGeom>
+            <a:solidFill>
+              <a:schemeClr val="accent4"/>
+            </a:solidFill>
+            <a:ln>
+              <a:noFill/>
+            </a:ln>
+          </p:spPr>
+          <p:txBody>
+            <a:bodyPr anchorCtr="0" anchor="ctr" bIns="91425" lIns="91425" spcFirstLastPara="1" rIns="91425" wrap="square" tIns="91425">
+              <a:noAutofit/>
+            </a:bodyPr>
+            <a:lstStyle/>
+            <a:p>
+              <a:pPr indent="0" lvl="0" marL="0" rtl="0" algn="l">
+                <a:spcBef>
+                  <a:spcPts val="0"/>
+                </a:spcBef>
+                <a:spcAft>
+                  <a:spcPts val="0"/>
+                </a:spcAft>
+                <a:buNone/>
+              </a:pPr>
+              <a:r>
+                <a:t/>
+              </a:r>
+              <a:endParaRPr/>
+            </a:p>
+          </p:txBody>
+        </p:sp>
+      </p:grpSp>
+    </p:spTree>
+  </p:cSld>
+  <p:clrMapOvr>
+    <a:masterClrMapping/>
+  </p:clrMapOvr>
+</p:sldLayout>
+</file>
+
+<file path=ppt/slideLayouts/slideLayout9.xml><?xml version="1.0" encoding="utf-8"?>
+<p:sldLayout xmlns:a="http://schemas.openxmlformats.org/drawingml/2006/main" xmlns:r="http://schemas.openxmlformats.org/officeDocument/2006/relationships" xmlns:mc="http://schemas.openxmlformats.org/markup-compatibility/2006" xmlns:mv="urn:schemas-microsoft-com:mac:vml" xmlns:p="http://schemas.openxmlformats.org/presentationml/2006/main" xmlns:c="http://schemas.openxmlformats.org/drawingml/2006/chart" xmlns:dgm="http://schemas.openxmlformats.org/drawingml/2006/diagram" xmlns:o="urn:schemas-microsoft-com:office:office" xmlns:v="urn:schemas-microsoft-com:vml" xmlns:pvml="urn:schemas-microsoft-com:office:powerpoint" xmlns:com="http://schemas.openxmlformats.org/drawingml/2006/compatibility" xmlns:p14="http://schemas.microsoft.com/office/powerpoint/2010/main" xmlns:p15="http://schemas.microsoft.com/office/powerpoint/2012/main" xmlns:ahyp="http://schemas.microsoft.com/office/drawing/2018/hyperlinkcolor" matchingName="Title and body" type="tx">
+  <p:cSld name="TITLE_AND_BODY">
+    <p:spTree>
+      <p:nvGrpSpPr>
+        <p:cNvPr id="64" name="Shape 64"/>
+        <p:cNvGrpSpPr/>
+        <p:nvPr/>
+      </p:nvGrpSpPr>
+      <p:grpSpPr>
+        <a:xfrm>
+          <a:off x="0" y="0"/>
+          <a:ext cx="0" cy="0"/>
+          <a:chOff x="0" y="0"/>
+          <a:chExt cx="0" cy="0"/>
+        </a:xfrm>
+      </p:grpSpPr>
+      <p:sp>
+        <p:nvSpPr>
+          <p:cNvPr id="65" name="Google Shape;65;p11"/>
+          <p:cNvSpPr txBox="1"/>
+          <p:nvPr>
+            <p:ph type="title"/>
+          </p:nvPr>
+        </p:nvSpPr>
+        <p:spPr>
+          <a:xfrm>
+            <a:off x="0" y="0"/>
+            <a:ext cx="9144000" cy="685800"/>
+          </a:xfrm>
+          <a:prstGeom prst="rect">
+            <a:avLst/>
+          </a:prstGeom>
+        </p:spPr>
+        <p:txBody>
+          <a:bodyPr anchorCtr="0" anchor="ctr" bIns="91425" lIns="274300" spcFirstLastPara="1" rIns="91425" wrap="square" tIns="91425">
+            <a:noAutofit/>
+          </a:bodyPr>
+          <a:lstStyle>
+            <a:lvl1pPr lvl="0">
+              <a:spcBef>
+                <a:spcPts val="0"/>
+              </a:spcBef>
+              <a:spcAft>
+                <a:spcPts val="0"/>
+              </a:spcAft>
+              <a:buSzPts val="2400"/>
+              <a:buNone/>
+              <a:defRPr/>
+            </a:lvl1pPr>
+            <a:lvl2pPr lvl="1">
+              <a:spcBef>
+                <a:spcPts val="0"/>
+              </a:spcBef>
+              <a:spcAft>
+                <a:spcPts val="0"/>
+              </a:spcAft>
+              <a:buSzPts val="2800"/>
+              <a:buNone/>
+              <a:defRPr/>
+            </a:lvl2pPr>
+            <a:lvl3pPr lvl="2">
+              <a:spcBef>
+                <a:spcPts val="0"/>
+              </a:spcBef>
+              <a:spcAft>
+                <a:spcPts val="0"/>
+              </a:spcAft>
+              <a:buSzPts val="2800"/>
+              <a:buNone/>
+              <a:defRPr/>
+            </a:lvl3pPr>
+            <a:lvl4pPr lvl="3">
+              <a:spcBef>
+                <a:spcPts val="0"/>
+              </a:spcBef>
+              <a:spcAft>
+                <a:spcPts val="0"/>
+              </a:spcAft>
+              <a:buSzPts val="2800"/>
+              <a:buNone/>
+              <a:defRPr/>
+            </a:lvl4pPr>
+            <a:lvl5pPr lvl="4">
+              <a:spcBef>
+                <a:spcPts val="0"/>
+              </a:spcBef>
+              <a:spcAft>
+                <a:spcPts val="0"/>
+              </a:spcAft>
+              <a:buSzPts val="2800"/>
+              <a:buNone/>
+              <a:defRPr/>
+            </a:lvl5pPr>
+            <a:lvl6pPr lvl="5">
+              <a:spcBef>
+                <a:spcPts val="0"/>
+              </a:spcBef>
+              <a:spcAft>
+                <a:spcPts val="0"/>
+              </a:spcAft>
+              <a:buSzPts val="2800"/>
+              <a:buNone/>
+              <a:defRPr/>
+            </a:lvl6pPr>
+            <a:lvl7pPr lvl="6">
+              <a:spcBef>
+                <a:spcPts val="0"/>
+              </a:spcBef>
+              <a:spcAft>
+                <a:spcPts val="0"/>
+              </a:spcAft>
+              <a:buSzPts val="2800"/>
+              <a:buNone/>
+              <a:defRPr/>
+            </a:lvl7pPr>
+            <a:lvl8pPr lvl="7">
+              <a:spcBef>
+                <a:spcPts val="0"/>
+              </a:spcBef>
+              <a:spcAft>
+                <a:spcPts val="0"/>
+              </a:spcAft>
+              <a:buSzPts val="2800"/>
+              <a:buNone/>
+              <a:defRPr/>
+            </a:lvl8pPr>
+            <a:lvl9pPr lvl="8">
+              <a:spcBef>
+                <a:spcPts val="0"/>
+              </a:spcBef>
+              <a:spcAft>
+                <a:spcPts val="0"/>
+              </a:spcAft>
+              <a:buSzPts val="2800"/>
+              <a:buNone/>
+              <a:defRPr/>
+            </a:lvl9pPr>
+          </a:lstStyle>
+          <a:p/>
+        </p:txBody>
+      </p:sp>
+      <p:sp>
+        <p:nvSpPr>
+          <p:cNvPr id="66" name="Google Shape;66;p11"/>
+          <p:cNvSpPr txBox="1"/>
+          <p:nvPr>
+            <p:ph idx="1" type="body"/>
+          </p:nvPr>
+        </p:nvSpPr>
+        <p:spPr>
+          <a:xfrm>
+            <a:off x="274320" y="914400"/>
+            <a:ext cx="8595300" cy="4114800"/>
+          </a:xfrm>
+          <a:prstGeom prst="rect">
+            <a:avLst/>
+          </a:prstGeom>
+        </p:spPr>
+        <p:txBody>
+          <a:bodyPr anchorCtr="0" anchor="t" bIns="0" lIns="0" spcFirstLastPara="1" rIns="0" wrap="square" tIns="0">
+            <a:noAutofit/>
+          </a:bodyPr>
+          <a:lstStyle>
+            <a:lvl1pPr indent="-342900" lvl="0" marL="457200">
+              <a:spcBef>
+                <a:spcPts val="0"/>
+              </a:spcBef>
+              <a:spcAft>
+                <a:spcPts val="0"/>
+              </a:spcAft>
+              <a:buSzPts val="1800"/>
+              <a:buChar char="●"/>
+              <a:defRPr/>
+            </a:lvl1pPr>
+            <a:lvl2pPr indent="-317500" lvl="1" marL="914400">
+              <a:spcBef>
+                <a:spcPts val="0"/>
+              </a:spcBef>
+              <a:spcAft>
+                <a:spcPts val="0"/>
+              </a:spcAft>
+              <a:buSzPts val="1400"/>
+              <a:buChar char="○"/>
+              <a:defRPr/>
+            </a:lvl2pPr>
+            <a:lvl3pPr indent="-317500" lvl="2" marL="1371600">
+              <a:spcBef>
+                <a:spcPts val="0"/>
+              </a:spcBef>
+              <a:spcAft>
+                <a:spcPts val="0"/>
+              </a:spcAft>
+              <a:buSzPts val="1400"/>
+              <a:buChar char="■"/>
+              <a:defRPr/>
+            </a:lvl3pPr>
+            <a:lvl4pPr indent="-317500" lvl="3" marL="1828800">
+              <a:spcBef>
+                <a:spcPts val="0"/>
+              </a:spcBef>
+              <a:spcAft>
+                <a:spcPts val="0"/>
+              </a:spcAft>
+              <a:buSzPts val="1400"/>
+              <a:buChar char="●"/>
+              <a:defRPr/>
+            </a:lvl4pPr>
+            <a:lvl5pPr indent="-317500" lvl="4" marL="2286000">
+              <a:spcBef>
+                <a:spcPts val="0"/>
+              </a:spcBef>
+              <a:spcAft>
+                <a:spcPts val="0"/>
+              </a:spcAft>
+              <a:buSzPts val="1400"/>
+              <a:buChar char="○"/>
+              <a:defRPr/>
+            </a:lvl5pPr>
+            <a:lvl6pPr indent="-317500" lvl="5" marL="2743200">
+              <a:spcBef>
+                <a:spcPts val="0"/>
+              </a:spcBef>
+              <a:spcAft>
+                <a:spcPts val="0"/>
+              </a:spcAft>
+              <a:buSzPts val="1400"/>
+              <a:buChar char="■"/>
+              <a:defRPr/>
+            </a:lvl6pPr>
+            <a:lvl7pPr indent="-317500" lvl="6" marL="3200400">
+              <a:spcBef>
+                <a:spcPts val="0"/>
+              </a:spcBef>
+              <a:spcAft>
+                <a:spcPts val="0"/>
+              </a:spcAft>
+              <a:buSzPts val="1400"/>
+              <a:buChar char="●"/>
+              <a:defRPr/>
+            </a:lvl7pPr>
+            <a:lvl8pPr indent="-317500" lvl="7" marL="3657600">
+              <a:spcBef>
+                <a:spcPts val="0"/>
+              </a:spcBef>
+              <a:spcAft>
+                <a:spcPts val="0"/>
+              </a:spcAft>
+              <a:buSzPts val="1400"/>
+              <a:buChar char="○"/>
+              <a:defRPr/>
+            </a:lvl8pPr>
+            <a:lvl9pPr indent="-317500" lvl="8" marL="4114800">
+              <a:spcBef>
+                <a:spcPts val="0"/>
+              </a:spcBef>
+              <a:spcAft>
+                <a:spcPts val="0"/>
+              </a:spcAft>
+              <a:buSzPts val="1400"/>
+              <a:buChar char="■"/>
+              <a:defRPr/>
+            </a:lvl9pPr>
+          </a:lstStyle>
+          <a:p/>
+        </p:txBody>
+      </p:sp>
+      <p:sp>
+        <p:nvSpPr>
+          <p:cNvPr id="67" name="Google Shape;67;p11"/>
+          <p:cNvSpPr txBox="1"/>
+          <p:nvPr>
+            <p:ph idx="12" type="sldNum"/>
+          </p:nvPr>
+        </p:nvSpPr>
+        <p:spPr>
+          <a:xfrm>
+            <a:off x="7315202" y="4416550"/>
+            <a:ext cx="1828800" cy="731400"/>
+          </a:xfrm>
+          <a:prstGeom prst="rect">
+            <a:avLst/>
+          </a:prstGeom>
+        </p:spPr>
+        <p:txBody>
+          <a:bodyPr anchorCtr="0" anchor="b" bIns="91425" lIns="91425" spcFirstLastPara="1" rIns="91425" wrap="square" tIns="91425">
+            <a:noAutofit/>
+          </a:bodyPr>
+          <a:lstStyle>
+            <a:lvl1pPr lvl="0" rtl="0">
+              <a:buNone/>
+              <a:defRPr>
+                <a:solidFill>
+                  <a:schemeClr val="dk1"/>
+                </a:solidFill>
+              </a:defRPr>
+            </a:lvl1pPr>
+            <a:lvl2pPr lvl="1" rtl="0">
+              <a:buNone/>
+              <a:defRPr>
+                <a:solidFill>
+                  <a:schemeClr val="dk1"/>
+                </a:solidFill>
+              </a:defRPr>
+            </a:lvl2pPr>
+            <a:lvl3pPr lvl="2" rtl="0">
+              <a:buNone/>
+              <a:defRPr>
+                <a:solidFill>
+                  <a:schemeClr val="dk1"/>
+                </a:solidFill>
+              </a:defRPr>
+            </a:lvl3pPr>
+            <a:lvl4pPr lvl="3" rtl="0">
+              <a:buNone/>
+              <a:defRPr>
+                <a:solidFill>
+                  <a:schemeClr val="dk1"/>
+                </a:solidFill>
+              </a:defRPr>
+            </a:lvl4pPr>
+            <a:lvl5pPr lvl="4" rtl="0">
+              <a:buNone/>
+              <a:defRPr>
+                <a:solidFill>
+                  <a:schemeClr val="dk1"/>
+                </a:solidFill>
+              </a:defRPr>
+            </a:lvl5pPr>
+            <a:lvl6pPr lvl="5" rtl="0">
+              <a:buNone/>
+              <a:defRPr>
+                <a:solidFill>
+                  <a:schemeClr val="dk1"/>
+                </a:solidFill>
+              </a:defRPr>
+            </a:lvl6pPr>
+            <a:lvl7pPr lvl="6" rtl="0">
+              <a:buNone/>
+              <a:defRPr>
+                <a:solidFill>
+                  <a:schemeClr val="dk1"/>
+                </a:solidFill>
+              </a:defRPr>
+            </a:lvl7pPr>
+            <a:lvl8pPr lvl="7" rtl="0">
+              <a:buNone/>
+              <a:defRPr>
+                <a:solidFill>
+                  <a:schemeClr val="dk1"/>
+                </a:solidFill>
+              </a:defRPr>
+            </a:lvl8pPr>
+            <a:lvl9pPr lvl="8" rtl="0">
+              <a:buNone/>
+              <a:defRPr>
+                <a:solidFill>
+                  <a:schemeClr val="dk1"/>
+                </a:solidFill>
+              </a:defRPr>
+            </a:lvl9pPr>
+          </a:lstStyle>
+          <a:p>
+            <a:pPr indent="0" lvl="0" marL="0" rtl="0" algn="r">
+              <a:spcBef>
+                <a:spcPts val="0"/>
+              </a:spcBef>
+              <a:spcAft>
+                <a:spcPts val="0"/>
+              </a:spcAft>
+              <a:buNone/>
+            </a:pPr>
+            <a:fld id="{00000000-1234-1234-1234-123412341234}" type="slidenum">
+              <a:rPr lang="en"/>
+              <a:t>‹#›</a:t>
+            </a:fld>
+            <a:endParaRPr/>
+          </a:p>
+          <a:p>
+            <a:pPr indent="0" lvl="0" marL="0" rtl="0" algn="r">
+              <a:spcBef>
+                <a:spcPts val="0"/>
+              </a:spcBef>
+              <a:spcAft>
+                <a:spcPts val="0"/>
+              </a:spcAft>
+              <a:buNone/>
+            </a:pPr>
+            <a:r>
+              <a:rPr b="0" lang="en" sz="900" u="sng">
+                <a:solidFill>
+                  <a:schemeClr val="hlink"/>
+                </a:solidFill>
+                <a:hlinkClick r:id="rId2"/>
+              </a:rPr>
+              <a:t>https://uni1.de/amos</a:t>
+            </a:r>
+            <a:r>
+              <a:rPr b="0" lang="en" sz="900">
+                <a:solidFill>
+                  <a:schemeClr val="dk2"/>
+                </a:solidFill>
+              </a:rPr>
+              <a:t> </a:t>
+            </a:r>
+            <a:endParaRPr b="0" sz="900">
+              <a:solidFill>
+                <a:schemeClr val="dk2"/>
+              </a:solidFill>
+            </a:endParaRPr>
+          </a:p>
+        </p:txBody>
+      </p:sp>
+      <p:grpSp>
+        <p:nvGrpSpPr>
+          <p:cNvPr id="68" name="Google Shape;68;p11"/>
+          <p:cNvGrpSpPr/>
+          <p:nvPr/>
+        </p:nvGrpSpPr>
+        <p:grpSpPr>
+          <a:xfrm>
+            <a:off x="0" y="685800"/>
+            <a:ext cx="9144000" cy="91500"/>
+            <a:chOff x="0" y="2386584"/>
+            <a:chExt cx="9144000" cy="91500"/>
+          </a:xfrm>
+        </p:grpSpPr>
+        <p:sp>
+          <p:nvSpPr>
+            <p:cNvPr id="69" name="Google Shape;69;p11"/>
+            <p:cNvSpPr/>
+            <p:nvPr/>
+          </p:nvSpPr>
+          <p:spPr>
+            <a:xfrm>
+              <a:off x="0" y="2386584"/>
+              <a:ext cx="914400" cy="91500"/>
+            </a:xfrm>
+            <a:prstGeom prst="rect">
+              <a:avLst/>
+            </a:prstGeom>
+            <a:solidFill>
+              <a:schemeClr val="accent2"/>
+            </a:solidFill>
+            <a:ln>
+              <a:noFill/>
+            </a:ln>
+          </p:spPr>
+          <p:txBody>
+            <a:bodyPr anchorCtr="0" anchor="ctr" bIns="91425" lIns="91425" spcFirstLastPara="1" rIns="91425" wrap="square" tIns="91425">
+              <a:noAutofit/>
+            </a:bodyPr>
+            <a:lstStyle/>
+            <a:p>
+              <a:pPr indent="0" lvl="0" marL="0" rtl="0" algn="l">
+                <a:spcBef>
+                  <a:spcPts val="0"/>
+                </a:spcBef>
+                <a:spcAft>
+                  <a:spcPts val="0"/>
+                </a:spcAft>
+                <a:buNone/>
+              </a:pPr>
+              <a:r>
+                <a:t/>
+              </a:r>
+              <a:endParaRPr/>
+            </a:p>
+          </p:txBody>
+        </p:sp>
+        <p:sp>
+          <p:nvSpPr>
+            <p:cNvPr id="70" name="Google Shape;70;p11"/>
+            <p:cNvSpPr/>
+            <p:nvPr/>
+          </p:nvSpPr>
+          <p:spPr>
+            <a:xfrm>
+              <a:off x="914400" y="2386584"/>
+              <a:ext cx="1828800" cy="91500"/>
+            </a:xfrm>
+            <a:prstGeom prst="rect">
+              <a:avLst/>
+            </a:prstGeom>
+            <a:solidFill>
+              <a:schemeClr val="accent3"/>
+            </a:solidFill>
+            <a:ln>
+              <a:noFill/>
+            </a:ln>
+          </p:spPr>
+          <p:txBody>
+            <a:bodyPr anchorCtr="0" anchor="ctr" bIns="91425" lIns="91425" spcFirstLastPara="1" rIns="91425" wrap="square" tIns="91425">
+              <a:noAutofit/>
+            </a:bodyPr>
+            <a:lstStyle/>
+            <a:p>
+              <a:pPr indent="0" lvl="0" marL="0" rtl="0" algn="l">
+                <a:spcBef>
+                  <a:spcPts val="0"/>
+                </a:spcBef>
+                <a:spcAft>
+                  <a:spcPts val="0"/>
+                </a:spcAft>
+                <a:buNone/>
+              </a:pPr>
+              <a:r>
+                <a:t/>
+              </a:r>
+              <a:endParaRPr/>
+            </a:p>
+          </p:txBody>
+        </p:sp>
+        <p:sp>
+          <p:nvSpPr>
+            <p:cNvPr id="71" name="Google Shape;71;p11"/>
+            <p:cNvSpPr/>
+            <p:nvPr/>
+          </p:nvSpPr>
+          <p:spPr>
+            <a:xfrm>
+              <a:off x="2743200" y="2386584"/>
+              <a:ext cx="6400800" cy="91500"/>
+            </a:xfrm>
+            <a:prstGeom prst="rect">
+              <a:avLst/>
+            </a:prstGeom>
+            <a:solidFill>
+              <a:schemeClr val="accent4"/>
+            </a:solidFill>
+            <a:ln>
+              <a:noFill/>
+            </a:ln>
+          </p:spPr>
+          <p:txBody>
+            <a:bodyPr anchorCtr="0" anchor="ctr" bIns="91425" lIns="91425" spcFirstLastPara="1" rIns="91425" wrap="square" tIns="91425">
+              <a:noAutofit/>
+            </a:bodyPr>
+            <a:lstStyle/>
+            <a:p>
+              <a:pPr indent="0" lvl="0" marL="0" rtl="0" algn="l">
+                <a:spcBef>
+                  <a:spcPts val="0"/>
+                </a:spcBef>
+                <a:spcAft>
+                  <a:spcPts val="0"/>
+                </a:spcAft>
+                <a:buNone/>
+              </a:pPr>
+              <a:r>
+                <a:t/>
+              </a:r>
+              <a:endParaRPr/>
+            </a:p>
+          </p:txBody>
+        </p:sp>
+      </p:grpSp>
     </p:spTree>
   </p:cSld>
   <p:clrMapOvr>
@@ -6634,12 +9111,19 @@
 </p:sldMaster>
 </file>
 
-<file path=ppt/slides/slide1.xml><?xml version="1.0" encoding="utf-8"?>
-<p:sld xmlns:a="http://schemas.openxmlformats.org/drawingml/2006/main" xmlns:r="http://schemas.openxmlformats.org/officeDocument/2006/relationships" xmlns:mc="http://schemas.openxmlformats.org/markup-compatibility/2006" xmlns:mv="urn:schemas-microsoft-com:mac:vml" xmlns:p="http://schemas.openxmlformats.org/presentationml/2006/main" xmlns:c="http://schemas.openxmlformats.org/drawingml/2006/chart" xmlns:dgm="http://schemas.openxmlformats.org/drawingml/2006/diagram" xmlns:o="urn:schemas-microsoft-com:office:office" xmlns:v="urn:schemas-microsoft-com:vml" xmlns:pvml="urn:schemas-microsoft-com:office:powerpoint" xmlns:com="http://schemas.openxmlformats.org/drawingml/2006/compatibility" xmlns:p14="http://schemas.microsoft.com/office/powerpoint/2010/main" xmlns:p15="http://schemas.microsoft.com/office/powerpoint/2012/main" xmlns:ahyp="http://schemas.microsoft.com/office/drawing/2018/hyperlinkcolor">
-  <p:cSld>
+<file path=ppt/slideMasters/slideMaster2.xml><?xml version="1.0" encoding="utf-8"?>
+<p:sldMaster xmlns:a="http://schemas.openxmlformats.org/drawingml/2006/main" xmlns:r="http://schemas.openxmlformats.org/officeDocument/2006/relationships" xmlns:mc="http://schemas.openxmlformats.org/markup-compatibility/2006" xmlns:mv="urn:schemas-microsoft-com:mac:vml" xmlns:p="http://schemas.openxmlformats.org/presentationml/2006/main" xmlns:c="http://schemas.openxmlformats.org/drawingml/2006/chart" xmlns:dgm="http://schemas.openxmlformats.org/drawingml/2006/diagram" xmlns:o="urn:schemas-microsoft-com:office:office" xmlns:v="urn:schemas-microsoft-com:vml" xmlns:pvml="urn:schemas-microsoft-com:office:powerpoint" xmlns:com="http://schemas.openxmlformats.org/drawingml/2006/compatibility" xmlns:p14="http://schemas.microsoft.com/office/powerpoint/2010/main" xmlns:p15="http://schemas.microsoft.com/office/powerpoint/2012/main" xmlns:ahyp="http://schemas.microsoft.com/office/drawing/2018/hyperlinkcolor">
+  <p:cSld name="simple-light-2">
+    <p:bg>
+      <p:bgPr>
+        <a:solidFill>
+          <a:schemeClr val="lt1"/>
+        </a:solidFill>
+      </p:bgPr>
+    </p:bg>
     <p:spTree>
       <p:nvGrpSpPr>
-        <p:cNvPr id="50" name="Shape 50"/>
+        <p:cNvPr id="47" name="Shape 47"/>
         <p:cNvGrpSpPr/>
         <p:nvPr/>
       </p:nvGrpSpPr>
@@ -6653,7 +9137,1281 @@
       </p:grpSpPr>
       <p:sp>
         <p:nvSpPr>
-          <p:cNvPr id="51" name="Google Shape;51;p8"/>
+          <p:cNvPr id="48" name="Google Shape;48;p8"/>
+          <p:cNvSpPr txBox="1"/>
+          <p:nvPr>
+            <p:ph type="title"/>
+          </p:nvPr>
+        </p:nvSpPr>
+        <p:spPr>
+          <a:xfrm>
+            <a:off x="0" y="0"/>
+            <a:ext cx="9144000" cy="685800"/>
+          </a:xfrm>
+          <a:prstGeom prst="rect">
+            <a:avLst/>
+          </a:prstGeom>
+          <a:noFill/>
+          <a:ln>
+            <a:noFill/>
+          </a:ln>
+        </p:spPr>
+        <p:txBody>
+          <a:bodyPr anchorCtr="0" anchor="ctr" bIns="0" lIns="274300" spcFirstLastPara="1" rIns="0" wrap="square" tIns="0">
+            <a:noAutofit/>
+          </a:bodyPr>
+          <a:lstStyle>
+            <a:lvl1pPr lvl="0">
+              <a:spcBef>
+                <a:spcPts val="0"/>
+              </a:spcBef>
+              <a:spcAft>
+                <a:spcPts val="0"/>
+              </a:spcAft>
+              <a:buClr>
+                <a:schemeClr val="dk1"/>
+              </a:buClr>
+              <a:buSzPts val="2400"/>
+              <a:buNone/>
+              <a:defRPr b="1" sz="2400">
+                <a:solidFill>
+                  <a:schemeClr val="dk1"/>
+                </a:solidFill>
+              </a:defRPr>
+            </a:lvl1pPr>
+            <a:lvl2pPr lvl="1">
+              <a:spcBef>
+                <a:spcPts val="0"/>
+              </a:spcBef>
+              <a:spcAft>
+                <a:spcPts val="0"/>
+              </a:spcAft>
+              <a:buClr>
+                <a:schemeClr val="dk1"/>
+              </a:buClr>
+              <a:buSzPts val="2800"/>
+              <a:buNone/>
+              <a:defRPr sz="2800">
+                <a:solidFill>
+                  <a:schemeClr val="dk1"/>
+                </a:solidFill>
+              </a:defRPr>
+            </a:lvl2pPr>
+            <a:lvl3pPr lvl="2">
+              <a:spcBef>
+                <a:spcPts val="0"/>
+              </a:spcBef>
+              <a:spcAft>
+                <a:spcPts val="0"/>
+              </a:spcAft>
+              <a:buClr>
+                <a:schemeClr val="dk1"/>
+              </a:buClr>
+              <a:buSzPts val="2800"/>
+              <a:buNone/>
+              <a:defRPr sz="2800">
+                <a:solidFill>
+                  <a:schemeClr val="dk1"/>
+                </a:solidFill>
+              </a:defRPr>
+            </a:lvl3pPr>
+            <a:lvl4pPr lvl="3">
+              <a:spcBef>
+                <a:spcPts val="0"/>
+              </a:spcBef>
+              <a:spcAft>
+                <a:spcPts val="0"/>
+              </a:spcAft>
+              <a:buClr>
+                <a:schemeClr val="dk1"/>
+              </a:buClr>
+              <a:buSzPts val="2800"/>
+              <a:buNone/>
+              <a:defRPr sz="2800">
+                <a:solidFill>
+                  <a:schemeClr val="dk1"/>
+                </a:solidFill>
+              </a:defRPr>
+            </a:lvl4pPr>
+            <a:lvl5pPr lvl="4">
+              <a:spcBef>
+                <a:spcPts val="0"/>
+              </a:spcBef>
+              <a:spcAft>
+                <a:spcPts val="0"/>
+              </a:spcAft>
+              <a:buClr>
+                <a:schemeClr val="dk1"/>
+              </a:buClr>
+              <a:buSzPts val="2800"/>
+              <a:buNone/>
+              <a:defRPr sz="2800">
+                <a:solidFill>
+                  <a:schemeClr val="dk1"/>
+                </a:solidFill>
+              </a:defRPr>
+            </a:lvl5pPr>
+            <a:lvl6pPr lvl="5">
+              <a:spcBef>
+                <a:spcPts val="0"/>
+              </a:spcBef>
+              <a:spcAft>
+                <a:spcPts val="0"/>
+              </a:spcAft>
+              <a:buClr>
+                <a:schemeClr val="dk1"/>
+              </a:buClr>
+              <a:buSzPts val="2800"/>
+              <a:buNone/>
+              <a:defRPr sz="2800">
+                <a:solidFill>
+                  <a:schemeClr val="dk1"/>
+                </a:solidFill>
+              </a:defRPr>
+            </a:lvl6pPr>
+            <a:lvl7pPr lvl="6">
+              <a:spcBef>
+                <a:spcPts val="0"/>
+              </a:spcBef>
+              <a:spcAft>
+                <a:spcPts val="0"/>
+              </a:spcAft>
+              <a:buClr>
+                <a:schemeClr val="dk1"/>
+              </a:buClr>
+              <a:buSzPts val="2800"/>
+              <a:buNone/>
+              <a:defRPr sz="2800">
+                <a:solidFill>
+                  <a:schemeClr val="dk1"/>
+                </a:solidFill>
+              </a:defRPr>
+            </a:lvl7pPr>
+            <a:lvl8pPr lvl="7">
+              <a:spcBef>
+                <a:spcPts val="0"/>
+              </a:spcBef>
+              <a:spcAft>
+                <a:spcPts val="0"/>
+              </a:spcAft>
+              <a:buClr>
+                <a:schemeClr val="dk1"/>
+              </a:buClr>
+              <a:buSzPts val="2800"/>
+              <a:buNone/>
+              <a:defRPr sz="2800">
+                <a:solidFill>
+                  <a:schemeClr val="dk1"/>
+                </a:solidFill>
+              </a:defRPr>
+            </a:lvl8pPr>
+            <a:lvl9pPr lvl="8">
+              <a:spcBef>
+                <a:spcPts val="0"/>
+              </a:spcBef>
+              <a:spcAft>
+                <a:spcPts val="0"/>
+              </a:spcAft>
+              <a:buClr>
+                <a:schemeClr val="dk1"/>
+              </a:buClr>
+              <a:buSzPts val="2800"/>
+              <a:buNone/>
+              <a:defRPr sz="2800">
+                <a:solidFill>
+                  <a:schemeClr val="dk1"/>
+                </a:solidFill>
+              </a:defRPr>
+            </a:lvl9pPr>
+          </a:lstStyle>
+          <a:p/>
+        </p:txBody>
+      </p:sp>
+      <p:sp>
+        <p:nvSpPr>
+          <p:cNvPr id="49" name="Google Shape;49;p8"/>
+          <p:cNvSpPr txBox="1"/>
+          <p:nvPr>
+            <p:ph idx="1" type="body"/>
+          </p:nvPr>
+        </p:nvSpPr>
+        <p:spPr>
+          <a:xfrm>
+            <a:off x="274320" y="914400"/>
+            <a:ext cx="8595300" cy="4114800"/>
+          </a:xfrm>
+          <a:prstGeom prst="rect">
+            <a:avLst/>
+          </a:prstGeom>
+          <a:noFill/>
+          <a:ln>
+            <a:noFill/>
+          </a:ln>
+        </p:spPr>
+        <p:txBody>
+          <a:bodyPr anchorCtr="0" anchor="t" bIns="0" lIns="0" spcFirstLastPara="1" rIns="0" wrap="square" tIns="0">
+            <a:noAutofit/>
+          </a:bodyPr>
+          <a:lstStyle>
+            <a:lvl1pPr indent="-342900" lvl="0" marL="457200">
+              <a:lnSpc>
+                <a:spcPct val="115000"/>
+              </a:lnSpc>
+              <a:spcBef>
+                <a:spcPts val="0"/>
+              </a:spcBef>
+              <a:spcAft>
+                <a:spcPts val="0"/>
+              </a:spcAft>
+              <a:buClr>
+                <a:schemeClr val="dk1"/>
+              </a:buClr>
+              <a:buSzPts val="1800"/>
+              <a:buChar char="●"/>
+              <a:defRPr sz="1800">
+                <a:solidFill>
+                  <a:schemeClr val="dk1"/>
+                </a:solidFill>
+              </a:defRPr>
+            </a:lvl1pPr>
+            <a:lvl2pPr indent="-317500" lvl="1" marL="914400">
+              <a:lnSpc>
+                <a:spcPct val="115000"/>
+              </a:lnSpc>
+              <a:spcBef>
+                <a:spcPts val="0"/>
+              </a:spcBef>
+              <a:spcAft>
+                <a:spcPts val="0"/>
+              </a:spcAft>
+              <a:buClr>
+                <a:schemeClr val="dk1"/>
+              </a:buClr>
+              <a:buSzPts val="1400"/>
+              <a:buChar char="○"/>
+              <a:defRPr>
+                <a:solidFill>
+                  <a:schemeClr val="dk1"/>
+                </a:solidFill>
+              </a:defRPr>
+            </a:lvl2pPr>
+            <a:lvl3pPr indent="-317500" lvl="2" marL="1371600">
+              <a:lnSpc>
+                <a:spcPct val="115000"/>
+              </a:lnSpc>
+              <a:spcBef>
+                <a:spcPts val="0"/>
+              </a:spcBef>
+              <a:spcAft>
+                <a:spcPts val="0"/>
+              </a:spcAft>
+              <a:buClr>
+                <a:schemeClr val="dk1"/>
+              </a:buClr>
+              <a:buSzPts val="1400"/>
+              <a:buChar char="■"/>
+              <a:defRPr>
+                <a:solidFill>
+                  <a:schemeClr val="dk1"/>
+                </a:solidFill>
+              </a:defRPr>
+            </a:lvl3pPr>
+            <a:lvl4pPr indent="-317500" lvl="3" marL="1828800">
+              <a:lnSpc>
+                <a:spcPct val="115000"/>
+              </a:lnSpc>
+              <a:spcBef>
+                <a:spcPts val="0"/>
+              </a:spcBef>
+              <a:spcAft>
+                <a:spcPts val="0"/>
+              </a:spcAft>
+              <a:buClr>
+                <a:schemeClr val="dk1"/>
+              </a:buClr>
+              <a:buSzPts val="1400"/>
+              <a:buChar char="●"/>
+              <a:defRPr>
+                <a:solidFill>
+                  <a:schemeClr val="dk1"/>
+                </a:solidFill>
+              </a:defRPr>
+            </a:lvl4pPr>
+            <a:lvl5pPr indent="-317500" lvl="4" marL="2286000">
+              <a:lnSpc>
+                <a:spcPct val="115000"/>
+              </a:lnSpc>
+              <a:spcBef>
+                <a:spcPts val="0"/>
+              </a:spcBef>
+              <a:spcAft>
+                <a:spcPts val="0"/>
+              </a:spcAft>
+              <a:buClr>
+                <a:schemeClr val="dk1"/>
+              </a:buClr>
+              <a:buSzPts val="1400"/>
+              <a:buChar char="○"/>
+              <a:defRPr>
+                <a:solidFill>
+                  <a:schemeClr val="dk1"/>
+                </a:solidFill>
+              </a:defRPr>
+            </a:lvl5pPr>
+            <a:lvl6pPr indent="-317500" lvl="5" marL="2743200">
+              <a:lnSpc>
+                <a:spcPct val="115000"/>
+              </a:lnSpc>
+              <a:spcBef>
+                <a:spcPts val="0"/>
+              </a:spcBef>
+              <a:spcAft>
+                <a:spcPts val="0"/>
+              </a:spcAft>
+              <a:buClr>
+                <a:schemeClr val="dk1"/>
+              </a:buClr>
+              <a:buSzPts val="1400"/>
+              <a:buChar char="■"/>
+              <a:defRPr>
+                <a:solidFill>
+                  <a:schemeClr val="dk1"/>
+                </a:solidFill>
+              </a:defRPr>
+            </a:lvl6pPr>
+            <a:lvl7pPr indent="-317500" lvl="6" marL="3200400">
+              <a:lnSpc>
+                <a:spcPct val="115000"/>
+              </a:lnSpc>
+              <a:spcBef>
+                <a:spcPts val="0"/>
+              </a:spcBef>
+              <a:spcAft>
+                <a:spcPts val="0"/>
+              </a:spcAft>
+              <a:buClr>
+                <a:schemeClr val="dk1"/>
+              </a:buClr>
+              <a:buSzPts val="1400"/>
+              <a:buChar char="●"/>
+              <a:defRPr>
+                <a:solidFill>
+                  <a:schemeClr val="dk1"/>
+                </a:solidFill>
+              </a:defRPr>
+            </a:lvl7pPr>
+            <a:lvl8pPr indent="-317500" lvl="7" marL="3657600">
+              <a:lnSpc>
+                <a:spcPct val="115000"/>
+              </a:lnSpc>
+              <a:spcBef>
+                <a:spcPts val="0"/>
+              </a:spcBef>
+              <a:spcAft>
+                <a:spcPts val="0"/>
+              </a:spcAft>
+              <a:buClr>
+                <a:schemeClr val="dk1"/>
+              </a:buClr>
+              <a:buSzPts val="1400"/>
+              <a:buChar char="○"/>
+              <a:defRPr>
+                <a:solidFill>
+                  <a:schemeClr val="dk1"/>
+                </a:solidFill>
+              </a:defRPr>
+            </a:lvl8pPr>
+            <a:lvl9pPr indent="-317500" lvl="8" marL="4114800">
+              <a:lnSpc>
+                <a:spcPct val="115000"/>
+              </a:lnSpc>
+              <a:spcBef>
+                <a:spcPts val="0"/>
+              </a:spcBef>
+              <a:spcAft>
+                <a:spcPts val="0"/>
+              </a:spcAft>
+              <a:buClr>
+                <a:schemeClr val="dk1"/>
+              </a:buClr>
+              <a:buSzPts val="1400"/>
+              <a:buChar char="■"/>
+              <a:defRPr>
+                <a:solidFill>
+                  <a:schemeClr val="dk1"/>
+                </a:solidFill>
+              </a:defRPr>
+            </a:lvl9pPr>
+          </a:lstStyle>
+          <a:p/>
+        </p:txBody>
+      </p:sp>
+      <p:sp>
+        <p:nvSpPr>
+          <p:cNvPr id="50" name="Google Shape;50;p8"/>
+          <p:cNvSpPr txBox="1"/>
+          <p:nvPr>
+            <p:ph idx="12" type="sldNum"/>
+          </p:nvPr>
+        </p:nvSpPr>
+        <p:spPr>
+          <a:xfrm>
+            <a:off x="7315202" y="4416550"/>
+            <a:ext cx="1828800" cy="731400"/>
+          </a:xfrm>
+          <a:prstGeom prst="rect">
+            <a:avLst/>
+          </a:prstGeom>
+          <a:noFill/>
+          <a:ln>
+            <a:noFill/>
+          </a:ln>
+        </p:spPr>
+        <p:txBody>
+          <a:bodyPr anchorCtr="0" anchor="b" bIns="91425" lIns="91425" spcFirstLastPara="1" rIns="91425" wrap="square" tIns="91425">
+            <a:noAutofit/>
+          </a:bodyPr>
+          <a:lstStyle>
+            <a:lvl1pPr lvl="0" rtl="0" algn="r">
+              <a:buNone/>
+              <a:defRPr b="1" sz="2400">
+                <a:solidFill>
+                  <a:schemeClr val="dk2"/>
+                </a:solidFill>
+              </a:defRPr>
+            </a:lvl1pPr>
+            <a:lvl2pPr lvl="1" rtl="0" algn="r">
+              <a:buNone/>
+              <a:defRPr b="1" sz="2400">
+                <a:solidFill>
+                  <a:schemeClr val="dk2"/>
+                </a:solidFill>
+              </a:defRPr>
+            </a:lvl2pPr>
+            <a:lvl3pPr lvl="2" rtl="0" algn="r">
+              <a:buNone/>
+              <a:defRPr b="1" sz="2400">
+                <a:solidFill>
+                  <a:schemeClr val="dk2"/>
+                </a:solidFill>
+              </a:defRPr>
+            </a:lvl3pPr>
+            <a:lvl4pPr lvl="3" rtl="0" algn="r">
+              <a:buNone/>
+              <a:defRPr b="1" sz="2400">
+                <a:solidFill>
+                  <a:schemeClr val="dk2"/>
+                </a:solidFill>
+              </a:defRPr>
+            </a:lvl4pPr>
+            <a:lvl5pPr lvl="4" rtl="0" algn="r">
+              <a:buNone/>
+              <a:defRPr b="1" sz="2400">
+                <a:solidFill>
+                  <a:schemeClr val="dk2"/>
+                </a:solidFill>
+              </a:defRPr>
+            </a:lvl5pPr>
+            <a:lvl6pPr lvl="5" rtl="0" algn="r">
+              <a:buNone/>
+              <a:defRPr b="1" sz="2400">
+                <a:solidFill>
+                  <a:schemeClr val="dk2"/>
+                </a:solidFill>
+              </a:defRPr>
+            </a:lvl6pPr>
+            <a:lvl7pPr lvl="6" rtl="0" algn="r">
+              <a:buNone/>
+              <a:defRPr b="1" sz="2400">
+                <a:solidFill>
+                  <a:schemeClr val="dk2"/>
+                </a:solidFill>
+              </a:defRPr>
+            </a:lvl7pPr>
+            <a:lvl8pPr lvl="7" rtl="0" algn="r">
+              <a:buNone/>
+              <a:defRPr b="1" sz="2400">
+                <a:solidFill>
+                  <a:schemeClr val="dk2"/>
+                </a:solidFill>
+              </a:defRPr>
+            </a:lvl8pPr>
+            <a:lvl9pPr lvl="8" rtl="0" algn="r">
+              <a:buNone/>
+              <a:defRPr b="1" sz="2400">
+                <a:solidFill>
+                  <a:schemeClr val="dk2"/>
+                </a:solidFill>
+              </a:defRPr>
+            </a:lvl9pPr>
+          </a:lstStyle>
+          <a:p>
+            <a:pPr indent="0" lvl="0" marL="0" rtl="0" algn="r">
+              <a:spcBef>
+                <a:spcPts val="0"/>
+              </a:spcBef>
+              <a:spcAft>
+                <a:spcPts val="0"/>
+              </a:spcAft>
+              <a:buNone/>
+            </a:pPr>
+            <a:fld id="{00000000-1234-1234-1234-123412341234}" type="slidenum">
+              <a:rPr lang="en"/>
+              <a:t>‹#›</a:t>
+            </a:fld>
+            <a:endParaRPr/>
+          </a:p>
+          <a:p>
+            <a:pPr indent="0" lvl="0" marL="0" rtl="0" algn="r">
+              <a:spcBef>
+                <a:spcPts val="0"/>
+              </a:spcBef>
+              <a:spcAft>
+                <a:spcPts val="0"/>
+              </a:spcAft>
+              <a:buNone/>
+            </a:pPr>
+            <a:r>
+              <a:rPr b="0" lang="en" sz="900" u="sng">
+                <a:solidFill>
+                  <a:schemeClr val="hlink"/>
+                </a:solidFill>
+                <a:hlinkClick r:id="rId1"/>
+              </a:rPr>
+              <a:t>https://uni1.de/amos</a:t>
+            </a:r>
+            <a:r>
+              <a:rPr b="0" lang="en" sz="900"/>
+              <a:t> </a:t>
+            </a:r>
+            <a:endParaRPr b="0" sz="900"/>
+          </a:p>
+        </p:txBody>
+      </p:sp>
+    </p:spTree>
+  </p:cSld>
+  <p:clrMap accent1="accent1" accent2="accent2" accent3="accent3" accent4="accent4" accent5="accent5" accent6="accent6" bg1="lt1" bg2="dk2" tx1="dk1" tx2="lt2" folHlink="folHlink" hlink="hlink"/>
+  <p:sldLayoutIdLst>
+    <p:sldLayoutId id="2147483654" r:id="rId2"/>
+    <p:sldLayoutId id="2147483655" r:id="rId3"/>
+    <p:sldLayoutId id="2147483656" r:id="rId4"/>
+    <p:sldLayoutId id="2147483657" r:id="rId5"/>
+    <p:sldLayoutId id="2147483658" r:id="rId6"/>
+    <p:sldLayoutId id="2147483659" r:id="rId7"/>
+  </p:sldLayoutIdLst>
+  <p:hf dt="0" ftr="0" hdr="0"/>
+  <p:txStyles>
+    <p:titleStyle>
+      <a:defPPr lvl="0" marR="0" rtl="0" algn="l">
+        <a:lnSpc>
+          <a:spcPct val="100000"/>
+        </a:lnSpc>
+        <a:spcBef>
+          <a:spcPts val="0"/>
+        </a:spcBef>
+        <a:spcAft>
+          <a:spcPts val="0"/>
+        </a:spcAft>
+      </a:defPPr>
+      <a:lvl1pPr lvl="0" marR="0" rtl="0" algn="l">
+        <a:lnSpc>
+          <a:spcPct val="100000"/>
+        </a:lnSpc>
+        <a:spcBef>
+          <a:spcPts val="0"/>
+        </a:spcBef>
+        <a:spcAft>
+          <a:spcPts val="0"/>
+        </a:spcAft>
+        <a:buClr>
+          <a:srgbClr val="000000"/>
+        </a:buClr>
+        <a:buFont typeface="Arial"/>
+        <a:defRPr b="0" i="0" sz="1400" u="none" cap="none" strike="noStrike">
+          <a:solidFill>
+            <a:srgbClr val="000000"/>
+          </a:solidFill>
+          <a:latin typeface="Arial"/>
+          <a:ea typeface="Arial"/>
+          <a:cs typeface="Arial"/>
+          <a:sym typeface="Arial"/>
+        </a:defRPr>
+      </a:lvl1pPr>
+      <a:lvl2pPr lvl="1" marR="0" rtl="0" algn="l">
+        <a:lnSpc>
+          <a:spcPct val="100000"/>
+        </a:lnSpc>
+        <a:spcBef>
+          <a:spcPts val="0"/>
+        </a:spcBef>
+        <a:spcAft>
+          <a:spcPts val="0"/>
+        </a:spcAft>
+        <a:buClr>
+          <a:srgbClr val="000000"/>
+        </a:buClr>
+        <a:buFont typeface="Arial"/>
+        <a:defRPr b="0" i="0" sz="1400" u="none" cap="none" strike="noStrike">
+          <a:solidFill>
+            <a:srgbClr val="000000"/>
+          </a:solidFill>
+          <a:latin typeface="Arial"/>
+          <a:ea typeface="Arial"/>
+          <a:cs typeface="Arial"/>
+          <a:sym typeface="Arial"/>
+        </a:defRPr>
+      </a:lvl2pPr>
+      <a:lvl3pPr lvl="2" marR="0" rtl="0" algn="l">
+        <a:lnSpc>
+          <a:spcPct val="100000"/>
+        </a:lnSpc>
+        <a:spcBef>
+          <a:spcPts val="0"/>
+        </a:spcBef>
+        <a:spcAft>
+          <a:spcPts val="0"/>
+        </a:spcAft>
+        <a:buClr>
+          <a:srgbClr val="000000"/>
+        </a:buClr>
+        <a:buFont typeface="Arial"/>
+        <a:defRPr b="0" i="0" sz="1400" u="none" cap="none" strike="noStrike">
+          <a:solidFill>
+            <a:srgbClr val="000000"/>
+          </a:solidFill>
+          <a:latin typeface="Arial"/>
+          <a:ea typeface="Arial"/>
+          <a:cs typeface="Arial"/>
+          <a:sym typeface="Arial"/>
+        </a:defRPr>
+      </a:lvl3pPr>
+      <a:lvl4pPr lvl="3" marR="0" rtl="0" algn="l">
+        <a:lnSpc>
+          <a:spcPct val="100000"/>
+        </a:lnSpc>
+        <a:spcBef>
+          <a:spcPts val="0"/>
+        </a:spcBef>
+        <a:spcAft>
+          <a:spcPts val="0"/>
+        </a:spcAft>
+        <a:buClr>
+          <a:srgbClr val="000000"/>
+        </a:buClr>
+        <a:buFont typeface="Arial"/>
+        <a:defRPr b="0" i="0" sz="1400" u="none" cap="none" strike="noStrike">
+          <a:solidFill>
+            <a:srgbClr val="000000"/>
+          </a:solidFill>
+          <a:latin typeface="Arial"/>
+          <a:ea typeface="Arial"/>
+          <a:cs typeface="Arial"/>
+          <a:sym typeface="Arial"/>
+        </a:defRPr>
+      </a:lvl4pPr>
+      <a:lvl5pPr lvl="4" marR="0" rtl="0" algn="l">
+        <a:lnSpc>
+          <a:spcPct val="100000"/>
+        </a:lnSpc>
+        <a:spcBef>
+          <a:spcPts val="0"/>
+        </a:spcBef>
+        <a:spcAft>
+          <a:spcPts val="0"/>
+        </a:spcAft>
+        <a:buClr>
+          <a:srgbClr val="000000"/>
+        </a:buClr>
+        <a:buFont typeface="Arial"/>
+        <a:defRPr b="0" i="0" sz="1400" u="none" cap="none" strike="noStrike">
+          <a:solidFill>
+            <a:srgbClr val="000000"/>
+          </a:solidFill>
+          <a:latin typeface="Arial"/>
+          <a:ea typeface="Arial"/>
+          <a:cs typeface="Arial"/>
+          <a:sym typeface="Arial"/>
+        </a:defRPr>
+      </a:lvl5pPr>
+      <a:lvl6pPr lvl="5" marR="0" rtl="0" algn="l">
+        <a:lnSpc>
+          <a:spcPct val="100000"/>
+        </a:lnSpc>
+        <a:spcBef>
+          <a:spcPts val="0"/>
+        </a:spcBef>
+        <a:spcAft>
+          <a:spcPts val="0"/>
+        </a:spcAft>
+        <a:buClr>
+          <a:srgbClr val="000000"/>
+        </a:buClr>
+        <a:buFont typeface="Arial"/>
+        <a:defRPr b="0" i="0" sz="1400" u="none" cap="none" strike="noStrike">
+          <a:solidFill>
+            <a:srgbClr val="000000"/>
+          </a:solidFill>
+          <a:latin typeface="Arial"/>
+          <a:ea typeface="Arial"/>
+          <a:cs typeface="Arial"/>
+          <a:sym typeface="Arial"/>
+        </a:defRPr>
+      </a:lvl6pPr>
+      <a:lvl7pPr lvl="6" marR="0" rtl="0" algn="l">
+        <a:lnSpc>
+          <a:spcPct val="100000"/>
+        </a:lnSpc>
+        <a:spcBef>
+          <a:spcPts val="0"/>
+        </a:spcBef>
+        <a:spcAft>
+          <a:spcPts val="0"/>
+        </a:spcAft>
+        <a:buClr>
+          <a:srgbClr val="000000"/>
+        </a:buClr>
+        <a:buFont typeface="Arial"/>
+        <a:defRPr b="0" i="0" sz="1400" u="none" cap="none" strike="noStrike">
+          <a:solidFill>
+            <a:srgbClr val="000000"/>
+          </a:solidFill>
+          <a:latin typeface="Arial"/>
+          <a:ea typeface="Arial"/>
+          <a:cs typeface="Arial"/>
+          <a:sym typeface="Arial"/>
+        </a:defRPr>
+      </a:lvl7pPr>
+      <a:lvl8pPr lvl="7" marR="0" rtl="0" algn="l">
+        <a:lnSpc>
+          <a:spcPct val="100000"/>
+        </a:lnSpc>
+        <a:spcBef>
+          <a:spcPts val="0"/>
+        </a:spcBef>
+        <a:spcAft>
+          <a:spcPts val="0"/>
+        </a:spcAft>
+        <a:buClr>
+          <a:srgbClr val="000000"/>
+        </a:buClr>
+        <a:buFont typeface="Arial"/>
+        <a:defRPr b="0" i="0" sz="1400" u="none" cap="none" strike="noStrike">
+          <a:solidFill>
+            <a:srgbClr val="000000"/>
+          </a:solidFill>
+          <a:latin typeface="Arial"/>
+          <a:ea typeface="Arial"/>
+          <a:cs typeface="Arial"/>
+          <a:sym typeface="Arial"/>
+        </a:defRPr>
+      </a:lvl8pPr>
+      <a:lvl9pPr lvl="8" marR="0" rtl="0" algn="l">
+        <a:lnSpc>
+          <a:spcPct val="100000"/>
+        </a:lnSpc>
+        <a:spcBef>
+          <a:spcPts val="0"/>
+        </a:spcBef>
+        <a:spcAft>
+          <a:spcPts val="0"/>
+        </a:spcAft>
+        <a:buClr>
+          <a:srgbClr val="000000"/>
+        </a:buClr>
+        <a:buFont typeface="Arial"/>
+        <a:defRPr b="0" i="0" sz="1400" u="none" cap="none" strike="noStrike">
+          <a:solidFill>
+            <a:srgbClr val="000000"/>
+          </a:solidFill>
+          <a:latin typeface="Arial"/>
+          <a:ea typeface="Arial"/>
+          <a:cs typeface="Arial"/>
+          <a:sym typeface="Arial"/>
+        </a:defRPr>
+      </a:lvl9pPr>
+    </p:titleStyle>
+    <p:bodyStyle>
+      <a:defPPr lvl="0" marR="0" rtl="0" algn="l">
+        <a:lnSpc>
+          <a:spcPct val="100000"/>
+        </a:lnSpc>
+        <a:spcBef>
+          <a:spcPts val="0"/>
+        </a:spcBef>
+        <a:spcAft>
+          <a:spcPts val="0"/>
+        </a:spcAft>
+      </a:defPPr>
+      <a:lvl1pPr lvl="0" marR="0" rtl="0" algn="l">
+        <a:lnSpc>
+          <a:spcPct val="100000"/>
+        </a:lnSpc>
+        <a:spcBef>
+          <a:spcPts val="0"/>
+        </a:spcBef>
+        <a:spcAft>
+          <a:spcPts val="0"/>
+        </a:spcAft>
+        <a:buClr>
+          <a:srgbClr val="000000"/>
+        </a:buClr>
+        <a:buFont typeface="Arial"/>
+        <a:defRPr b="0" i="0" sz="1400" u="none" cap="none" strike="noStrike">
+          <a:solidFill>
+            <a:srgbClr val="000000"/>
+          </a:solidFill>
+          <a:latin typeface="Arial"/>
+          <a:ea typeface="Arial"/>
+          <a:cs typeface="Arial"/>
+          <a:sym typeface="Arial"/>
+        </a:defRPr>
+      </a:lvl1pPr>
+      <a:lvl2pPr lvl="1" marR="0" rtl="0" algn="l">
+        <a:lnSpc>
+          <a:spcPct val="100000"/>
+        </a:lnSpc>
+        <a:spcBef>
+          <a:spcPts val="0"/>
+        </a:spcBef>
+        <a:spcAft>
+          <a:spcPts val="0"/>
+        </a:spcAft>
+        <a:buClr>
+          <a:srgbClr val="000000"/>
+        </a:buClr>
+        <a:buFont typeface="Arial"/>
+        <a:defRPr b="0" i="0" sz="1400" u="none" cap="none" strike="noStrike">
+          <a:solidFill>
+            <a:srgbClr val="000000"/>
+          </a:solidFill>
+          <a:latin typeface="Arial"/>
+          <a:ea typeface="Arial"/>
+          <a:cs typeface="Arial"/>
+          <a:sym typeface="Arial"/>
+        </a:defRPr>
+      </a:lvl2pPr>
+      <a:lvl3pPr lvl="2" marR="0" rtl="0" algn="l">
+        <a:lnSpc>
+          <a:spcPct val="100000"/>
+        </a:lnSpc>
+        <a:spcBef>
+          <a:spcPts val="0"/>
+        </a:spcBef>
+        <a:spcAft>
+          <a:spcPts val="0"/>
+        </a:spcAft>
+        <a:buClr>
+          <a:srgbClr val="000000"/>
+        </a:buClr>
+        <a:buFont typeface="Arial"/>
+        <a:defRPr b="0" i="0" sz="1400" u="none" cap="none" strike="noStrike">
+          <a:solidFill>
+            <a:srgbClr val="000000"/>
+          </a:solidFill>
+          <a:latin typeface="Arial"/>
+          <a:ea typeface="Arial"/>
+          <a:cs typeface="Arial"/>
+          <a:sym typeface="Arial"/>
+        </a:defRPr>
+      </a:lvl3pPr>
+      <a:lvl4pPr lvl="3" marR="0" rtl="0" algn="l">
+        <a:lnSpc>
+          <a:spcPct val="100000"/>
+        </a:lnSpc>
+        <a:spcBef>
+          <a:spcPts val="0"/>
+        </a:spcBef>
+        <a:spcAft>
+          <a:spcPts val="0"/>
+        </a:spcAft>
+        <a:buClr>
+          <a:srgbClr val="000000"/>
+        </a:buClr>
+        <a:buFont typeface="Arial"/>
+        <a:defRPr b="0" i="0" sz="1400" u="none" cap="none" strike="noStrike">
+          <a:solidFill>
+            <a:srgbClr val="000000"/>
+          </a:solidFill>
+          <a:latin typeface="Arial"/>
+          <a:ea typeface="Arial"/>
+          <a:cs typeface="Arial"/>
+          <a:sym typeface="Arial"/>
+        </a:defRPr>
+      </a:lvl4pPr>
+      <a:lvl5pPr lvl="4" marR="0" rtl="0" algn="l">
+        <a:lnSpc>
+          <a:spcPct val="100000"/>
+        </a:lnSpc>
+        <a:spcBef>
+          <a:spcPts val="0"/>
+        </a:spcBef>
+        <a:spcAft>
+          <a:spcPts val="0"/>
+        </a:spcAft>
+        <a:buClr>
+          <a:srgbClr val="000000"/>
+        </a:buClr>
+        <a:buFont typeface="Arial"/>
+        <a:defRPr b="0" i="0" sz="1400" u="none" cap="none" strike="noStrike">
+          <a:solidFill>
+            <a:srgbClr val="000000"/>
+          </a:solidFill>
+          <a:latin typeface="Arial"/>
+          <a:ea typeface="Arial"/>
+          <a:cs typeface="Arial"/>
+          <a:sym typeface="Arial"/>
+        </a:defRPr>
+      </a:lvl5pPr>
+      <a:lvl6pPr lvl="5" marR="0" rtl="0" algn="l">
+        <a:lnSpc>
+          <a:spcPct val="100000"/>
+        </a:lnSpc>
+        <a:spcBef>
+          <a:spcPts val="0"/>
+        </a:spcBef>
+        <a:spcAft>
+          <a:spcPts val="0"/>
+        </a:spcAft>
+        <a:buClr>
+          <a:srgbClr val="000000"/>
+        </a:buClr>
+        <a:buFont typeface="Arial"/>
+        <a:defRPr b="0" i="0" sz="1400" u="none" cap="none" strike="noStrike">
+          <a:solidFill>
+            <a:srgbClr val="000000"/>
+          </a:solidFill>
+          <a:latin typeface="Arial"/>
+          <a:ea typeface="Arial"/>
+          <a:cs typeface="Arial"/>
+          <a:sym typeface="Arial"/>
+        </a:defRPr>
+      </a:lvl6pPr>
+      <a:lvl7pPr lvl="6" marR="0" rtl="0" algn="l">
+        <a:lnSpc>
+          <a:spcPct val="100000"/>
+        </a:lnSpc>
+        <a:spcBef>
+          <a:spcPts val="0"/>
+        </a:spcBef>
+        <a:spcAft>
+          <a:spcPts val="0"/>
+        </a:spcAft>
+        <a:buClr>
+          <a:srgbClr val="000000"/>
+        </a:buClr>
+        <a:buFont typeface="Arial"/>
+        <a:defRPr b="0" i="0" sz="1400" u="none" cap="none" strike="noStrike">
+          <a:solidFill>
+            <a:srgbClr val="000000"/>
+          </a:solidFill>
+          <a:latin typeface="Arial"/>
+          <a:ea typeface="Arial"/>
+          <a:cs typeface="Arial"/>
+          <a:sym typeface="Arial"/>
+        </a:defRPr>
+      </a:lvl7pPr>
+      <a:lvl8pPr lvl="7" marR="0" rtl="0" algn="l">
+        <a:lnSpc>
+          <a:spcPct val="100000"/>
+        </a:lnSpc>
+        <a:spcBef>
+          <a:spcPts val="0"/>
+        </a:spcBef>
+        <a:spcAft>
+          <a:spcPts val="0"/>
+        </a:spcAft>
+        <a:buClr>
+          <a:srgbClr val="000000"/>
+        </a:buClr>
+        <a:buFont typeface="Arial"/>
+        <a:defRPr b="0" i="0" sz="1400" u="none" cap="none" strike="noStrike">
+          <a:solidFill>
+            <a:srgbClr val="000000"/>
+          </a:solidFill>
+          <a:latin typeface="Arial"/>
+          <a:ea typeface="Arial"/>
+          <a:cs typeface="Arial"/>
+          <a:sym typeface="Arial"/>
+        </a:defRPr>
+      </a:lvl8pPr>
+      <a:lvl9pPr lvl="8" marR="0" rtl="0" algn="l">
+        <a:lnSpc>
+          <a:spcPct val="100000"/>
+        </a:lnSpc>
+        <a:spcBef>
+          <a:spcPts val="0"/>
+        </a:spcBef>
+        <a:spcAft>
+          <a:spcPts val="0"/>
+        </a:spcAft>
+        <a:buClr>
+          <a:srgbClr val="000000"/>
+        </a:buClr>
+        <a:buFont typeface="Arial"/>
+        <a:defRPr b="0" i="0" sz="1400" u="none" cap="none" strike="noStrike">
+          <a:solidFill>
+            <a:srgbClr val="000000"/>
+          </a:solidFill>
+          <a:latin typeface="Arial"/>
+          <a:ea typeface="Arial"/>
+          <a:cs typeface="Arial"/>
+          <a:sym typeface="Arial"/>
+        </a:defRPr>
+      </a:lvl9pPr>
+    </p:bodyStyle>
+    <p:otherStyle>
+      <a:defPPr lvl="0" marR="0" rtl="0" algn="l">
+        <a:lnSpc>
+          <a:spcPct val="100000"/>
+        </a:lnSpc>
+        <a:spcBef>
+          <a:spcPts val="0"/>
+        </a:spcBef>
+        <a:spcAft>
+          <a:spcPts val="0"/>
+        </a:spcAft>
+      </a:defPPr>
+      <a:lvl1pPr lvl="0" marR="0" rtl="0" algn="l">
+        <a:lnSpc>
+          <a:spcPct val="100000"/>
+        </a:lnSpc>
+        <a:spcBef>
+          <a:spcPts val="0"/>
+        </a:spcBef>
+        <a:spcAft>
+          <a:spcPts val="0"/>
+        </a:spcAft>
+        <a:buClr>
+          <a:srgbClr val="000000"/>
+        </a:buClr>
+        <a:buFont typeface="Arial"/>
+        <a:defRPr b="0" i="0" sz="1400" u="none" cap="none" strike="noStrike">
+          <a:solidFill>
+            <a:srgbClr val="000000"/>
+          </a:solidFill>
+          <a:latin typeface="Arial"/>
+          <a:ea typeface="Arial"/>
+          <a:cs typeface="Arial"/>
+          <a:sym typeface="Arial"/>
+        </a:defRPr>
+      </a:lvl1pPr>
+      <a:lvl2pPr lvl="1" marR="0" rtl="0" algn="l">
+        <a:lnSpc>
+          <a:spcPct val="100000"/>
+        </a:lnSpc>
+        <a:spcBef>
+          <a:spcPts val="0"/>
+        </a:spcBef>
+        <a:spcAft>
+          <a:spcPts val="0"/>
+        </a:spcAft>
+        <a:buClr>
+          <a:srgbClr val="000000"/>
+        </a:buClr>
+        <a:buFont typeface="Arial"/>
+        <a:defRPr b="0" i="0" sz="1400" u="none" cap="none" strike="noStrike">
+          <a:solidFill>
+            <a:srgbClr val="000000"/>
+          </a:solidFill>
+          <a:latin typeface="Arial"/>
+          <a:ea typeface="Arial"/>
+          <a:cs typeface="Arial"/>
+          <a:sym typeface="Arial"/>
+        </a:defRPr>
+      </a:lvl2pPr>
+      <a:lvl3pPr lvl="2" marR="0" rtl="0" algn="l">
+        <a:lnSpc>
+          <a:spcPct val="100000"/>
+        </a:lnSpc>
+        <a:spcBef>
+          <a:spcPts val="0"/>
+        </a:spcBef>
+        <a:spcAft>
+          <a:spcPts val="0"/>
+        </a:spcAft>
+        <a:buClr>
+          <a:srgbClr val="000000"/>
+        </a:buClr>
+        <a:buFont typeface="Arial"/>
+        <a:defRPr b="0" i="0" sz="1400" u="none" cap="none" strike="noStrike">
+          <a:solidFill>
+            <a:srgbClr val="000000"/>
+          </a:solidFill>
+          <a:latin typeface="Arial"/>
+          <a:ea typeface="Arial"/>
+          <a:cs typeface="Arial"/>
+          <a:sym typeface="Arial"/>
+        </a:defRPr>
+      </a:lvl3pPr>
+      <a:lvl4pPr lvl="3" marR="0" rtl="0" algn="l">
+        <a:lnSpc>
+          <a:spcPct val="100000"/>
+        </a:lnSpc>
+        <a:spcBef>
+          <a:spcPts val="0"/>
+        </a:spcBef>
+        <a:spcAft>
+          <a:spcPts val="0"/>
+        </a:spcAft>
+        <a:buClr>
+          <a:srgbClr val="000000"/>
+        </a:buClr>
+        <a:buFont typeface="Arial"/>
+        <a:defRPr b="0" i="0" sz="1400" u="none" cap="none" strike="noStrike">
+          <a:solidFill>
+            <a:srgbClr val="000000"/>
+          </a:solidFill>
+          <a:latin typeface="Arial"/>
+          <a:ea typeface="Arial"/>
+          <a:cs typeface="Arial"/>
+          <a:sym typeface="Arial"/>
+        </a:defRPr>
+      </a:lvl4pPr>
+      <a:lvl5pPr lvl="4" marR="0" rtl="0" algn="l">
+        <a:lnSpc>
+          <a:spcPct val="100000"/>
+        </a:lnSpc>
+        <a:spcBef>
+          <a:spcPts val="0"/>
+        </a:spcBef>
+        <a:spcAft>
+          <a:spcPts val="0"/>
+        </a:spcAft>
+        <a:buClr>
+          <a:srgbClr val="000000"/>
+        </a:buClr>
+        <a:buFont typeface="Arial"/>
+        <a:defRPr b="0" i="0" sz="1400" u="none" cap="none" strike="noStrike">
+          <a:solidFill>
+            <a:srgbClr val="000000"/>
+          </a:solidFill>
+          <a:latin typeface="Arial"/>
+          <a:ea typeface="Arial"/>
+          <a:cs typeface="Arial"/>
+          <a:sym typeface="Arial"/>
+        </a:defRPr>
+      </a:lvl5pPr>
+      <a:lvl6pPr lvl="5" marR="0" rtl="0" algn="l">
+        <a:lnSpc>
+          <a:spcPct val="100000"/>
+        </a:lnSpc>
+        <a:spcBef>
+          <a:spcPts val="0"/>
+        </a:spcBef>
+        <a:spcAft>
+          <a:spcPts val="0"/>
+        </a:spcAft>
+        <a:buClr>
+          <a:srgbClr val="000000"/>
+        </a:buClr>
+        <a:buFont typeface="Arial"/>
+        <a:defRPr b="0" i="0" sz="1400" u="none" cap="none" strike="noStrike">
+          <a:solidFill>
+            <a:srgbClr val="000000"/>
+          </a:solidFill>
+          <a:latin typeface="Arial"/>
+          <a:ea typeface="Arial"/>
+          <a:cs typeface="Arial"/>
+          <a:sym typeface="Arial"/>
+        </a:defRPr>
+      </a:lvl6pPr>
+      <a:lvl7pPr lvl="6" marR="0" rtl="0" algn="l">
+        <a:lnSpc>
+          <a:spcPct val="100000"/>
+        </a:lnSpc>
+        <a:spcBef>
+          <a:spcPts val="0"/>
+        </a:spcBef>
+        <a:spcAft>
+          <a:spcPts val="0"/>
+        </a:spcAft>
+        <a:buClr>
+          <a:srgbClr val="000000"/>
+        </a:buClr>
+        <a:buFont typeface="Arial"/>
+        <a:defRPr b="0" i="0" sz="1400" u="none" cap="none" strike="noStrike">
+          <a:solidFill>
+            <a:srgbClr val="000000"/>
+          </a:solidFill>
+          <a:latin typeface="Arial"/>
+          <a:ea typeface="Arial"/>
+          <a:cs typeface="Arial"/>
+          <a:sym typeface="Arial"/>
+        </a:defRPr>
+      </a:lvl7pPr>
+      <a:lvl8pPr lvl="7" marR="0" rtl="0" algn="l">
+        <a:lnSpc>
+          <a:spcPct val="100000"/>
+        </a:lnSpc>
+        <a:spcBef>
+          <a:spcPts val="0"/>
+        </a:spcBef>
+        <a:spcAft>
+          <a:spcPts val="0"/>
+        </a:spcAft>
+        <a:buClr>
+          <a:srgbClr val="000000"/>
+        </a:buClr>
+        <a:buFont typeface="Arial"/>
+        <a:defRPr b="0" i="0" sz="1400" u="none" cap="none" strike="noStrike">
+          <a:solidFill>
+            <a:srgbClr val="000000"/>
+          </a:solidFill>
+          <a:latin typeface="Arial"/>
+          <a:ea typeface="Arial"/>
+          <a:cs typeface="Arial"/>
+          <a:sym typeface="Arial"/>
+        </a:defRPr>
+      </a:lvl8pPr>
+      <a:lvl9pPr lvl="8" marR="0" rtl="0" algn="l">
+        <a:lnSpc>
+          <a:spcPct val="100000"/>
+        </a:lnSpc>
+        <a:spcBef>
+          <a:spcPts val="0"/>
+        </a:spcBef>
+        <a:spcAft>
+          <a:spcPts val="0"/>
+        </a:spcAft>
+        <a:buClr>
+          <a:srgbClr val="000000"/>
+        </a:buClr>
+        <a:buFont typeface="Arial"/>
+        <a:defRPr b="0" i="0" sz="1400" u="none" cap="none" strike="noStrike">
+          <a:solidFill>
+            <a:srgbClr val="000000"/>
+          </a:solidFill>
+          <a:latin typeface="Arial"/>
+          <a:ea typeface="Arial"/>
+          <a:cs typeface="Arial"/>
+          <a:sym typeface="Arial"/>
+        </a:defRPr>
+      </a:lvl9pPr>
+    </p:otherStyle>
+  </p:txStyles>
+</p:sldMaster>
+</file>
+
+<file path=ppt/slides/slide1.xml><?xml version="1.0" encoding="utf-8"?>
+<p:sld xmlns:a="http://schemas.openxmlformats.org/drawingml/2006/main" xmlns:r="http://schemas.openxmlformats.org/officeDocument/2006/relationships" xmlns:mc="http://schemas.openxmlformats.org/markup-compatibility/2006" xmlns:mv="urn:schemas-microsoft-com:mac:vml" xmlns:p="http://schemas.openxmlformats.org/presentationml/2006/main" xmlns:c="http://schemas.openxmlformats.org/drawingml/2006/chart" xmlns:dgm="http://schemas.openxmlformats.org/drawingml/2006/diagram" xmlns:o="urn:schemas-microsoft-com:office:office" xmlns:v="urn:schemas-microsoft-com:vml" xmlns:pvml="urn:schemas-microsoft-com:office:powerpoint" xmlns:com="http://schemas.openxmlformats.org/drawingml/2006/compatibility" xmlns:p14="http://schemas.microsoft.com/office/powerpoint/2010/main" xmlns:p15="http://schemas.microsoft.com/office/powerpoint/2012/main" xmlns:ahyp="http://schemas.microsoft.com/office/drawing/2018/hyperlinkcolor">
+  <p:cSld>
+    <p:spTree>
+      <p:nvGrpSpPr>
+        <p:cNvPr id="92" name="Shape 92"/>
+        <p:cNvGrpSpPr/>
+        <p:nvPr/>
+      </p:nvGrpSpPr>
+      <p:grpSpPr>
+        <a:xfrm>
+          <a:off x="0" y="0"/>
+          <a:ext cx="0" cy="0"/>
+          <a:chOff x="0" y="0"/>
+          <a:chExt cx="0" cy="0"/>
+        </a:xfrm>
+      </p:grpSpPr>
+      <p:sp>
+        <p:nvSpPr>
+          <p:cNvPr id="93" name="Google Shape;93;p15"/>
           <p:cNvSpPr txBox="1"/>
           <p:nvPr>
             <p:ph type="ctrTitle"/>
@@ -6693,7 +10451,7 @@
       </p:sp>
       <p:sp>
         <p:nvSpPr>
-          <p:cNvPr id="52" name="Google Shape;52;p8"/>
+          <p:cNvPr id="94" name="Google Shape;94;p15"/>
           <p:cNvSpPr txBox="1"/>
           <p:nvPr>
             <p:ph idx="1" type="subTitle"/>
@@ -6800,7 +10558,7 @@
   <p:cSld>
     <p:spTree>
       <p:nvGrpSpPr>
-        <p:cNvPr id="109" name="Shape 109"/>
+        <p:cNvPr id="151" name="Shape 151"/>
         <p:cNvGrpSpPr/>
         <p:nvPr/>
       </p:nvGrpSpPr>
@@ -6814,7 +10572,7 @@
       </p:grpSpPr>
       <p:sp>
         <p:nvSpPr>
-          <p:cNvPr id="110" name="Google Shape;110;p17"/>
+          <p:cNvPr id="152" name="Google Shape;152;p24"/>
           <p:cNvSpPr txBox="1"/>
           <p:nvPr>
             <p:ph type="title"/>
@@ -6854,7 +10612,7 @@
       </p:sp>
       <p:sp>
         <p:nvSpPr>
-          <p:cNvPr id="111" name="Google Shape;111;p17"/>
+          <p:cNvPr id="153" name="Google Shape;153;p24"/>
           <p:cNvSpPr txBox="1"/>
           <p:nvPr>
             <p:ph idx="1" type="body"/>
@@ -6898,7 +10656,7 @@
       </p:sp>
       <p:sp>
         <p:nvSpPr>
-          <p:cNvPr id="112" name="Google Shape;112;p17"/>
+          <p:cNvPr id="154" name="Google Shape;154;p24"/>
           <p:cNvSpPr txBox="1"/>
           <p:nvPr>
             <p:ph idx="12" type="sldNum"/>
@@ -6982,7 +10740,7 @@
   <p:cSld>
     <p:spTree>
       <p:nvGrpSpPr>
-        <p:cNvPr id="116" name="Shape 116"/>
+        <p:cNvPr id="158" name="Shape 158"/>
         <p:cNvGrpSpPr/>
         <p:nvPr/>
       </p:nvGrpSpPr>
@@ -6996,7 +10754,7 @@
       </p:grpSpPr>
       <p:sp>
         <p:nvSpPr>
-          <p:cNvPr id="117" name="Google Shape;117;p18"/>
+          <p:cNvPr id="159" name="Google Shape;159;p25"/>
           <p:cNvSpPr txBox="1"/>
           <p:nvPr>
             <p:ph type="title"/>
@@ -7036,7 +10794,7 @@
       </p:sp>
       <p:sp>
         <p:nvSpPr>
-          <p:cNvPr id="118" name="Google Shape;118;p18"/>
+          <p:cNvPr id="160" name="Google Shape;160;p25"/>
           <p:cNvSpPr txBox="1"/>
           <p:nvPr>
             <p:ph idx="12" type="sldNum"/>
@@ -7109,7 +10867,7 @@
       </p:sp>
       <p:pic>
         <p:nvPicPr>
-          <p:cNvPr id="119" name="Google Shape;119;p18"/>
+          <p:cNvPr id="161" name="Google Shape;161;p25"/>
           <p:cNvPicPr preferRelativeResize="0"/>
           <p:nvPr/>
         </p:nvPicPr>
@@ -7123,8 +10881,8 @@
         </p:blipFill>
         <p:spPr>
           <a:xfrm>
-            <a:off x="274320" y="914400"/>
-            <a:ext cx="8595360" cy="3495446"/>
+            <a:off x="0" y="731520"/>
+            <a:ext cx="9144001" cy="3931920"/>
           </a:xfrm>
           <a:prstGeom prst="rect">
             <a:avLst/>
@@ -7148,7 +10906,7 @@
   <p:cSld>
     <p:spTree>
       <p:nvGrpSpPr>
-        <p:cNvPr id="123" name="Shape 123"/>
+        <p:cNvPr id="165" name="Shape 165"/>
         <p:cNvGrpSpPr/>
         <p:nvPr/>
       </p:nvGrpSpPr>
@@ -7162,7 +10920,7 @@
       </p:grpSpPr>
       <p:sp>
         <p:nvSpPr>
-          <p:cNvPr id="124" name="Google Shape;124;p19"/>
+          <p:cNvPr id="166" name="Google Shape;166;p26"/>
           <p:cNvSpPr txBox="1"/>
           <p:nvPr>
             <p:ph type="title"/>
@@ -7213,7 +10971,7 @@
   <p:cSld>
     <p:spTree>
       <p:nvGrpSpPr>
-        <p:cNvPr id="128" name="Shape 128"/>
+        <p:cNvPr id="170" name="Shape 170"/>
         <p:cNvGrpSpPr/>
         <p:nvPr/>
       </p:nvGrpSpPr>
@@ -7227,7 +10985,7 @@
       </p:grpSpPr>
       <p:sp>
         <p:nvSpPr>
-          <p:cNvPr id="129" name="Google Shape;129;p20"/>
+          <p:cNvPr id="171" name="Google Shape;171;p27"/>
           <p:cNvSpPr txBox="1"/>
           <p:nvPr>
             <p:ph type="title"/>
@@ -7267,7 +11025,7 @@
       </p:sp>
       <p:sp>
         <p:nvSpPr>
-          <p:cNvPr id="130" name="Google Shape;130;p20"/>
+          <p:cNvPr id="172" name="Google Shape;172;p27"/>
           <p:cNvSpPr txBox="1"/>
           <p:nvPr>
             <p:ph idx="1" type="body"/>
@@ -7323,7 +11081,7 @@
       </p:sp>
       <p:sp>
         <p:nvSpPr>
-          <p:cNvPr id="131" name="Google Shape;131;p20"/>
+          <p:cNvPr id="173" name="Google Shape;173;p27"/>
           <p:cNvSpPr txBox="1"/>
           <p:nvPr>
             <p:ph idx="12" type="sldNum"/>
@@ -7407,7 +11165,7 @@
   <p:cSld>
     <p:spTree>
       <p:nvGrpSpPr>
-        <p:cNvPr id="135" name="Shape 135"/>
+        <p:cNvPr id="177" name="Shape 177"/>
         <p:cNvGrpSpPr/>
         <p:nvPr/>
       </p:nvGrpSpPr>
@@ -7421,7 +11179,7 @@
       </p:grpSpPr>
       <p:sp>
         <p:nvSpPr>
-          <p:cNvPr id="136" name="Google Shape;136;p21"/>
+          <p:cNvPr id="178" name="Google Shape;178;p28"/>
           <p:cNvSpPr txBox="1"/>
           <p:nvPr>
             <p:ph type="title"/>
@@ -7472,7 +11230,7 @@
   <p:cSld>
     <p:spTree>
       <p:nvGrpSpPr>
-        <p:cNvPr id="140" name="Shape 140"/>
+        <p:cNvPr id="182" name="Shape 182"/>
         <p:cNvGrpSpPr/>
         <p:nvPr/>
       </p:nvGrpSpPr>
@@ -7486,7 +11244,7 @@
       </p:grpSpPr>
       <p:sp>
         <p:nvSpPr>
-          <p:cNvPr id="141" name="Google Shape;141;p22"/>
+          <p:cNvPr id="183" name="Google Shape;183;p29"/>
           <p:cNvSpPr txBox="1"/>
           <p:nvPr>
             <p:ph type="title"/>
@@ -7526,7 +11284,7 @@
       </p:sp>
       <p:sp>
         <p:nvSpPr>
-          <p:cNvPr id="142" name="Google Shape;142;p22"/>
+          <p:cNvPr id="184" name="Google Shape;184;p29"/>
           <p:cNvSpPr txBox="1"/>
           <p:nvPr>
             <p:ph idx="1" type="body"/>
@@ -7582,7 +11340,7 @@
       </p:sp>
       <p:sp>
         <p:nvSpPr>
-          <p:cNvPr id="143" name="Google Shape;143;p22"/>
+          <p:cNvPr id="185" name="Google Shape;185;p29"/>
           <p:cNvSpPr txBox="1"/>
           <p:nvPr>
             <p:ph idx="12" type="sldNum"/>
@@ -7666,7 +11424,7 @@
   <p:cSld>
     <p:spTree>
       <p:nvGrpSpPr>
-        <p:cNvPr id="147" name="Shape 147"/>
+        <p:cNvPr id="189" name="Shape 189"/>
         <p:cNvGrpSpPr/>
         <p:nvPr/>
       </p:nvGrpSpPr>
@@ -7680,7 +11438,7 @@
       </p:grpSpPr>
       <p:sp>
         <p:nvSpPr>
-          <p:cNvPr id="148" name="Google Shape;148;p23"/>
+          <p:cNvPr id="190" name="Google Shape;190;p30"/>
           <p:cNvSpPr txBox="1"/>
           <p:nvPr>
             <p:ph type="title"/>
@@ -7731,7 +11489,7 @@
   <p:cSld>
     <p:spTree>
       <p:nvGrpSpPr>
-        <p:cNvPr id="152" name="Shape 152"/>
+        <p:cNvPr id="194" name="Shape 194"/>
         <p:cNvGrpSpPr/>
         <p:nvPr/>
       </p:nvGrpSpPr>
@@ -7745,7 +11503,7 @@
       </p:grpSpPr>
       <p:sp>
         <p:nvSpPr>
-          <p:cNvPr id="153" name="Google Shape;153;p24"/>
+          <p:cNvPr id="195" name="Google Shape;195;p31"/>
           <p:cNvSpPr txBox="1"/>
           <p:nvPr>
             <p:ph type="title"/>
@@ -7785,7 +11543,7 @@
       </p:sp>
       <p:sp>
         <p:nvSpPr>
-          <p:cNvPr id="154" name="Google Shape;154;p24"/>
+          <p:cNvPr id="196" name="Google Shape;196;p31"/>
           <p:cNvSpPr txBox="1"/>
           <p:nvPr>
             <p:ph idx="1" type="body"/>
@@ -7841,7 +11599,7 @@
       </p:sp>
       <p:sp>
         <p:nvSpPr>
-          <p:cNvPr id="155" name="Google Shape;155;p24"/>
+          <p:cNvPr id="197" name="Google Shape;197;p31"/>
           <p:cNvSpPr txBox="1"/>
           <p:nvPr>
             <p:ph idx="12" type="sldNum"/>
@@ -7925,7 +11683,7 @@
   <p:cSld>
     <p:spTree>
       <p:nvGrpSpPr>
-        <p:cNvPr id="159" name="Shape 159"/>
+        <p:cNvPr id="201" name="Shape 201"/>
         <p:cNvGrpSpPr/>
         <p:nvPr/>
       </p:nvGrpSpPr>
@@ -7939,7 +11697,7 @@
       </p:grpSpPr>
       <p:sp>
         <p:nvSpPr>
-          <p:cNvPr id="160" name="Google Shape;160;p25"/>
+          <p:cNvPr id="202" name="Google Shape;202;p32"/>
           <p:cNvSpPr txBox="1"/>
           <p:nvPr>
             <p:ph type="title"/>
@@ -7990,7 +11748,7 @@
   <p:cSld>
     <p:spTree>
       <p:nvGrpSpPr>
-        <p:cNvPr id="164" name="Shape 164"/>
+        <p:cNvPr id="206" name="Shape 206"/>
         <p:cNvGrpSpPr/>
         <p:nvPr/>
       </p:nvGrpSpPr>
@@ -8004,7 +11762,7 @@
       </p:grpSpPr>
       <p:sp>
         <p:nvSpPr>
-          <p:cNvPr id="165" name="Google Shape;165;p26"/>
+          <p:cNvPr id="207" name="Google Shape;207;p33"/>
           <p:cNvSpPr txBox="1"/>
           <p:nvPr>
             <p:ph type="title"/>
@@ -8044,7 +11802,7 @@
       </p:sp>
       <p:sp>
         <p:nvSpPr>
-          <p:cNvPr id="166" name="Google Shape;166;p26"/>
+          <p:cNvPr id="208" name="Google Shape;208;p33"/>
           <p:cNvSpPr txBox="1"/>
           <p:nvPr>
             <p:ph idx="1" type="body"/>
@@ -8084,7 +11842,7 @@
       </p:sp>
       <p:sp>
         <p:nvSpPr>
-          <p:cNvPr id="167" name="Google Shape;167;p26"/>
+          <p:cNvPr id="209" name="Google Shape;209;p33"/>
           <p:cNvSpPr txBox="1"/>
           <p:nvPr>
             <p:ph idx="12" type="sldNum"/>
@@ -8168,7 +11926,7 @@
   <p:cSld>
     <p:spTree>
       <p:nvGrpSpPr>
-        <p:cNvPr id="56" name="Shape 56"/>
+        <p:cNvPr id="98" name="Shape 98"/>
         <p:cNvGrpSpPr/>
         <p:nvPr/>
       </p:nvGrpSpPr>
@@ -8182,7 +11940,7 @@
       </p:grpSpPr>
       <p:sp>
         <p:nvSpPr>
-          <p:cNvPr id="57" name="Google Shape;57;p9"/>
+          <p:cNvPr id="99" name="Google Shape;99;p16"/>
           <p:cNvSpPr txBox="1"/>
           <p:nvPr>
             <p:ph type="title"/>
@@ -8222,7 +11980,7 @@
       </p:sp>
       <p:sp>
         <p:nvSpPr>
-          <p:cNvPr id="58" name="Google Shape;58;p9"/>
+          <p:cNvPr id="100" name="Google Shape;100;p16"/>
           <p:cNvSpPr txBox="1"/>
           <p:nvPr>
             <p:ph idx="1" type="body"/>
@@ -8360,7 +12118,7 @@
       </p:sp>
       <p:sp>
         <p:nvSpPr>
-          <p:cNvPr id="59" name="Google Shape;59;p9"/>
+          <p:cNvPr id="101" name="Google Shape;101;p16"/>
           <p:cNvSpPr txBox="1"/>
           <p:nvPr>
             <p:ph idx="12" type="sldNum"/>
@@ -8444,7 +12202,7 @@
   <p:cSld>
     <p:spTree>
       <p:nvGrpSpPr>
-        <p:cNvPr id="171" name="Shape 171"/>
+        <p:cNvPr id="213" name="Shape 213"/>
         <p:cNvGrpSpPr/>
         <p:nvPr/>
       </p:nvGrpSpPr>
@@ -8458,7 +12216,7 @@
       </p:grpSpPr>
       <p:sp>
         <p:nvSpPr>
-          <p:cNvPr id="172" name="Google Shape;172;p27"/>
+          <p:cNvPr id="214" name="Google Shape;214;p34"/>
           <p:cNvSpPr txBox="1"/>
           <p:nvPr>
             <p:ph type="title"/>
@@ -8498,7 +12256,7 @@
       </p:sp>
       <p:sp>
         <p:nvSpPr>
-          <p:cNvPr id="173" name="Google Shape;173;p27"/>
+          <p:cNvPr id="215" name="Google Shape;215;p34"/>
           <p:cNvSpPr txBox="1"/>
           <p:nvPr>
             <p:ph idx="1" type="body"/>
@@ -8624,7 +12382,7 @@
       </p:sp>
       <p:sp>
         <p:nvSpPr>
-          <p:cNvPr id="174" name="Google Shape;174;p27"/>
+          <p:cNvPr id="216" name="Google Shape;216;p34"/>
           <p:cNvSpPr txBox="1"/>
           <p:nvPr>
             <p:ph idx="12" type="sldNum"/>
@@ -8708,7 +12466,7 @@
   <p:cSld>
     <p:spTree>
       <p:nvGrpSpPr>
-        <p:cNvPr id="178" name="Shape 178"/>
+        <p:cNvPr id="220" name="Shape 220"/>
         <p:cNvGrpSpPr/>
         <p:nvPr/>
       </p:nvGrpSpPr>
@@ -8722,7 +12480,7 @@
       </p:grpSpPr>
       <p:sp>
         <p:nvSpPr>
-          <p:cNvPr id="179" name="Google Shape;179;p28"/>
+          <p:cNvPr id="221" name="Google Shape;221;p35"/>
           <p:cNvSpPr txBox="1"/>
           <p:nvPr>
             <p:ph type="ctrTitle"/>
@@ -8762,7 +12520,7 @@
       </p:sp>
       <p:sp>
         <p:nvSpPr>
-          <p:cNvPr id="180" name="Google Shape;180;p28"/>
+          <p:cNvPr id="222" name="Google Shape;222;p35"/>
           <p:cNvSpPr txBox="1"/>
           <p:nvPr>
             <p:ph idx="1" type="subTitle"/>
@@ -8892,7 +12650,7 @@
   <p:cSld>
     <p:spTree>
       <p:nvGrpSpPr>
-        <p:cNvPr id="184" name="Shape 184"/>
+        <p:cNvPr id="226" name="Shape 226"/>
         <p:cNvGrpSpPr/>
         <p:nvPr/>
       </p:nvGrpSpPr>
@@ -8906,7 +12664,7 @@
       </p:grpSpPr>
       <p:sp>
         <p:nvSpPr>
-          <p:cNvPr id="185" name="Google Shape;185;p29"/>
+          <p:cNvPr id="227" name="Google Shape;227;p36"/>
           <p:cNvSpPr txBox="1"/>
           <p:nvPr>
             <p:ph type="title"/>
@@ -8946,7 +12704,7 @@
       </p:sp>
       <p:sp>
         <p:nvSpPr>
-          <p:cNvPr id="186" name="Google Shape;186;p29"/>
+          <p:cNvPr id="228" name="Google Shape;228;p36"/>
           <p:cNvSpPr txBox="1"/>
           <p:nvPr>
             <p:ph idx="12" type="sldNum"/>
@@ -9019,7 +12777,7 @@
       </p:sp>
       <p:sp>
         <p:nvSpPr>
-          <p:cNvPr id="187" name="Google Shape;187;p29"/>
+          <p:cNvPr id="229" name="Google Shape;229;p36"/>
           <p:cNvSpPr txBox="1"/>
           <p:nvPr>
             <p:ph idx="1" type="body"/>
@@ -9114,7 +12872,7 @@
             </a:pPr>
             <a:r>
               <a:rPr lang="en"/>
-              <a:t>© Copyright 2009-2025 Dirk Riehle, some rights reserved</a:t>
+              <a:t>© Copyright 2009-2026 Dirk Riehle, some rights reserved</a:t>
             </a:r>
             <a:endParaRPr/>
           </a:p>
@@ -9148,7 +12906,7 @@
   <p:cSld>
     <p:spTree>
       <p:nvGrpSpPr>
-        <p:cNvPr id="63" name="Shape 63"/>
+        <p:cNvPr id="105" name="Shape 105"/>
         <p:cNvGrpSpPr/>
         <p:nvPr/>
       </p:nvGrpSpPr>
@@ -9162,7 +12920,7 @@
       </p:grpSpPr>
       <p:sp>
         <p:nvSpPr>
-          <p:cNvPr id="64" name="Google Shape;64;p10"/>
+          <p:cNvPr id="106" name="Google Shape;106;p17"/>
           <p:cNvSpPr txBox="1"/>
           <p:nvPr>
             <p:ph type="title"/>
@@ -9213,7 +12971,7 @@
   <p:cSld>
     <p:spTree>
       <p:nvGrpSpPr>
-        <p:cNvPr id="68" name="Shape 68"/>
+        <p:cNvPr id="110" name="Shape 110"/>
         <p:cNvGrpSpPr/>
         <p:nvPr/>
       </p:nvGrpSpPr>
@@ -9227,7 +12985,7 @@
       </p:grpSpPr>
       <p:sp>
         <p:nvSpPr>
-          <p:cNvPr id="69" name="Google Shape;69;p11"/>
+          <p:cNvPr id="111" name="Google Shape;111;p18"/>
           <p:cNvSpPr txBox="1"/>
           <p:nvPr>
             <p:ph type="title"/>
@@ -9267,7 +13025,7 @@
       </p:sp>
       <p:sp>
         <p:nvSpPr>
-          <p:cNvPr id="70" name="Google Shape;70;p11"/>
+          <p:cNvPr id="112" name="Google Shape;112;p18"/>
           <p:cNvSpPr txBox="1"/>
           <p:nvPr>
             <p:ph idx="12" type="sldNum"/>
@@ -9340,7 +13098,7 @@
       </p:sp>
       <p:sp>
         <p:nvSpPr>
-          <p:cNvPr id="71" name="Google Shape;71;p11"/>
+          <p:cNvPr id="113" name="Google Shape;113;p18"/>
           <p:cNvSpPr txBox="1"/>
           <p:nvPr>
             <p:ph idx="1" type="body"/>
@@ -9515,7 +13273,7 @@
   <p:cSld>
     <p:spTree>
       <p:nvGrpSpPr>
-        <p:cNvPr id="75" name="Shape 75"/>
+        <p:cNvPr id="117" name="Shape 117"/>
         <p:cNvGrpSpPr/>
         <p:nvPr/>
       </p:nvGrpSpPr>
@@ -9529,7 +13287,7 @@
       </p:grpSpPr>
       <p:sp>
         <p:nvSpPr>
-          <p:cNvPr id="76" name="Google Shape;76;p12"/>
+          <p:cNvPr id="118" name="Google Shape;118;p19"/>
           <p:cNvSpPr txBox="1"/>
           <p:nvPr>
             <p:ph type="title"/>
@@ -9569,7 +13327,7 @@
       </p:sp>
       <p:sp>
         <p:nvSpPr>
-          <p:cNvPr id="77" name="Google Shape;77;p12"/>
+          <p:cNvPr id="119" name="Google Shape;119;p19"/>
           <p:cNvSpPr txBox="1"/>
           <p:nvPr>
             <p:ph idx="1" type="body"/>
@@ -9682,7 +13440,7 @@
       </p:sp>
       <p:sp>
         <p:nvSpPr>
-          <p:cNvPr id="78" name="Google Shape;78;p12"/>
+          <p:cNvPr id="120" name="Google Shape;120;p19"/>
           <p:cNvSpPr txBox="1"/>
           <p:nvPr>
             <p:ph idx="12" type="sldNum"/>
@@ -9766,7 +13524,7 @@
   <p:cSld>
     <p:spTree>
       <p:nvGrpSpPr>
-        <p:cNvPr id="82" name="Shape 82"/>
+        <p:cNvPr id="124" name="Shape 124"/>
         <p:cNvGrpSpPr/>
         <p:nvPr/>
       </p:nvGrpSpPr>
@@ -9780,7 +13538,7 @@
       </p:grpSpPr>
       <p:sp>
         <p:nvSpPr>
-          <p:cNvPr id="83" name="Google Shape;83;p13"/>
+          <p:cNvPr id="125" name="Google Shape;125;p20"/>
           <p:cNvSpPr txBox="1"/>
           <p:nvPr>
             <p:ph type="title"/>
@@ -9820,7 +13578,7 @@
       </p:sp>
       <p:sp>
         <p:nvSpPr>
-          <p:cNvPr id="84" name="Google Shape;84;p13"/>
+          <p:cNvPr id="126" name="Google Shape;126;p20"/>
           <p:cNvSpPr txBox="1"/>
           <p:nvPr>
             <p:ph idx="1" type="body"/>
@@ -9926,7 +13684,7 @@
       </p:sp>
       <p:sp>
         <p:nvSpPr>
-          <p:cNvPr id="85" name="Google Shape;85;p13"/>
+          <p:cNvPr id="127" name="Google Shape;127;p20"/>
           <p:cNvSpPr txBox="1"/>
           <p:nvPr>
             <p:ph idx="12" type="sldNum"/>
@@ -10010,7 +13768,7 @@
   <p:cSld>
     <p:spTree>
       <p:nvGrpSpPr>
-        <p:cNvPr id="89" name="Shape 89"/>
+        <p:cNvPr id="131" name="Shape 131"/>
         <p:cNvGrpSpPr/>
         <p:nvPr/>
       </p:nvGrpSpPr>
@@ -10024,7 +13782,7 @@
       </p:grpSpPr>
       <p:sp>
         <p:nvSpPr>
-          <p:cNvPr id="90" name="Google Shape;90;p14"/>
+          <p:cNvPr id="132" name="Google Shape;132;p21"/>
           <p:cNvSpPr txBox="1"/>
           <p:nvPr>
             <p:ph type="title"/>
@@ -10075,7 +13833,7 @@
   <p:cSld>
     <p:spTree>
       <p:nvGrpSpPr>
-        <p:cNvPr id="94" name="Shape 94"/>
+        <p:cNvPr id="136" name="Shape 136"/>
         <p:cNvGrpSpPr/>
         <p:nvPr/>
       </p:nvGrpSpPr>
@@ -10089,7 +13847,7 @@
       </p:grpSpPr>
       <p:sp>
         <p:nvSpPr>
-          <p:cNvPr id="95" name="Google Shape;95;p15"/>
+          <p:cNvPr id="137" name="Google Shape;137;p22"/>
           <p:cNvSpPr txBox="1"/>
           <p:nvPr>
             <p:ph type="title"/>
@@ -10129,7 +13887,7 @@
       </p:sp>
       <p:sp>
         <p:nvSpPr>
-          <p:cNvPr id="96" name="Google Shape;96;p15"/>
+          <p:cNvPr id="138" name="Google Shape;138;p22"/>
           <p:cNvSpPr txBox="1"/>
           <p:nvPr>
             <p:ph idx="1" type="body"/>
@@ -10230,7 +13988,7 @@
       </p:sp>
       <p:sp>
         <p:nvSpPr>
-          <p:cNvPr id="97" name="Google Shape;97;p15"/>
+          <p:cNvPr id="139" name="Google Shape;139;p22"/>
           <p:cNvSpPr txBox="1"/>
           <p:nvPr>
             <p:ph idx="12" type="sldNum"/>
@@ -10314,7 +14072,7 @@
   <p:cSld>
     <p:spTree>
       <p:nvGrpSpPr>
-        <p:cNvPr id="101" name="Shape 101"/>
+        <p:cNvPr id="143" name="Shape 143"/>
         <p:cNvGrpSpPr/>
         <p:nvPr/>
       </p:nvGrpSpPr>
@@ -10328,7 +14086,7 @@
       </p:grpSpPr>
       <p:sp>
         <p:nvSpPr>
-          <p:cNvPr id="102" name="Google Shape;102;p16"/>
+          <p:cNvPr id="144" name="Google Shape;144;p23"/>
           <p:cNvSpPr txBox="1"/>
           <p:nvPr>
             <p:ph type="title"/>
@@ -10368,7 +14126,7 @@
       </p:sp>
       <p:sp>
         <p:nvSpPr>
-          <p:cNvPr id="103" name="Google Shape;103;p16"/>
+          <p:cNvPr id="145" name="Google Shape;145;p23"/>
           <p:cNvSpPr txBox="1"/>
           <p:nvPr>
             <p:ph idx="1" type="body"/>
@@ -10442,7 +14200,7 @@
       </p:sp>
       <p:sp>
         <p:nvSpPr>
-          <p:cNvPr id="104" name="Google Shape;104;p16"/>
+          <p:cNvPr id="146" name="Google Shape;146;p23"/>
           <p:cNvSpPr txBox="1"/>
           <p:nvPr>
             <p:ph idx="12" type="sldNum"/>
@@ -10515,7 +14273,7 @@
       </p:sp>
       <p:sp>
         <p:nvSpPr>
-          <p:cNvPr id="105" name="Google Shape;105;p16"/>
+          <p:cNvPr id="147" name="Google Shape;147;p23"/>
           <p:cNvSpPr txBox="1"/>
           <p:nvPr/>
         </p:nvSpPr>
@@ -10568,7 +14326,286 @@
 </file>
 
 <file path=ppt/theme/theme1.xml><?xml version="1.0" encoding="utf-8"?>
-<a:theme xmlns:a="http://schemas.openxmlformats.org/drawingml/2006/main" xmlns:r="http://schemas.openxmlformats.org/officeDocument/2006/relationships" name="POSS Slides Template">
+<a:theme xmlns:a="http://schemas.openxmlformats.org/drawingml/2006/main" xmlns:r="http://schemas.openxmlformats.org/officeDocument/2006/relationships">
+  <a:themeElements>
+    <a:clrScheme name="Default">
+      <a:dk1>
+        <a:srgbClr val="000000"/>
+      </a:dk1>
+      <a:lt1>
+        <a:srgbClr val="FFFFFF"/>
+      </a:lt1>
+      <a:dk2>
+        <a:srgbClr val="158158"/>
+      </a:dk2>
+      <a:lt2>
+        <a:srgbClr val="F3F3F3"/>
+      </a:lt2>
+      <a:accent1>
+        <a:srgbClr val="058DC7"/>
+      </a:accent1>
+      <a:accent2>
+        <a:srgbClr val="50B432"/>
+      </a:accent2>
+      <a:accent3>
+        <a:srgbClr val="ED561B"/>
+      </a:accent3>
+      <a:accent4>
+        <a:srgbClr val="EDEF00"/>
+      </a:accent4>
+      <a:accent5>
+        <a:srgbClr val="24CBE5"/>
+      </a:accent5>
+      <a:accent6>
+        <a:srgbClr val="64E572"/>
+      </a:accent6>
+      <a:hlink>
+        <a:srgbClr val="2200CC"/>
+      </a:hlink>
+      <a:folHlink>
+        <a:srgbClr val="551A8B"/>
+      </a:folHlink>
+    </a:clrScheme>
+    <a:fontScheme name="Office">
+      <a:majorFont>
+        <a:latin typeface="Arial"/>
+        <a:ea typeface=""/>
+        <a:cs typeface=""/>
+        <a:font script="Jpan" typeface="ＭＳ Ｐゴシック"/>
+        <a:font script="Hang" typeface="맑은 고딕"/>
+        <a:font script="Hans" typeface="宋体"/>
+        <a:font script="Hant" typeface="新細明體"/>
+        <a:font script="Arab" typeface="Times New Roman"/>
+        <a:font script="Hebr" typeface="Times New Roman"/>
+        <a:font script="Thai" typeface="Angsana New"/>
+        <a:font script="Ethi" typeface="Nyala"/>
+        <a:font script="Beng" typeface="Vrinda"/>
+        <a:font script="Gujr" typeface="Shruti"/>
+        <a:font script="Khmr" typeface="MoolBoran"/>
+        <a:font script="Knda" typeface="Tunga"/>
+        <a:font script="Guru" typeface="Raavi"/>
+        <a:font script="Cans" typeface="Euphemia"/>
+        <a:font script="Cher" typeface="Plantagenet Cherokee"/>
+        <a:font script="Yiii" typeface="Microsoft Yi Baiti"/>
+        <a:font script="Tibt" typeface="Microsoft Himalaya"/>
+        <a:font script="Thaa" typeface="MV Boli"/>
+        <a:font script="Deva" typeface="Mangal"/>
+        <a:font script="Telu" typeface="Gautami"/>
+        <a:font script="Taml" typeface="Latha"/>
+        <a:font script="Syrc" typeface="Estrangelo Edessa"/>
+        <a:font script="Orya" typeface="Kalinga"/>
+        <a:font script="Mlym" typeface="Kartika"/>
+        <a:font script="Laoo" typeface="DokChampa"/>
+        <a:font script="Sinh" typeface="Iskoola Pota"/>
+        <a:font script="Mong" typeface="Mongolian Baiti"/>
+        <a:font script="Viet" typeface="Times New Roman"/>
+        <a:font script="Uigh" typeface="Microsoft Uighur"/>
+        <a:font script="Geor" typeface="Sylfaen"/>
+      </a:majorFont>
+      <a:minorFont>
+        <a:latin typeface="Arial"/>
+        <a:ea typeface=""/>
+        <a:cs typeface=""/>
+        <a:font script="Jpan" typeface="ＭＳ Ｐゴシック"/>
+        <a:font script="Hang" typeface="맑은 고딕"/>
+        <a:font script="Hans" typeface="宋体"/>
+        <a:font script="Hant" typeface="新細明體"/>
+        <a:font script="Arab" typeface="Arial"/>
+        <a:font script="Hebr" typeface="Arial"/>
+        <a:font script="Thai" typeface="Cordia New"/>
+        <a:font script="Ethi" typeface="Nyala"/>
+        <a:font script="Beng" typeface="Vrinda"/>
+        <a:font script="Gujr" typeface="Shruti"/>
+        <a:font script="Khmr" typeface="DaunPenh"/>
+        <a:font script="Knda" typeface="Tunga"/>
+        <a:font script="Guru" typeface="Raavi"/>
+        <a:font script="Cans" typeface="Euphemia"/>
+        <a:font script="Cher" typeface="Plantagenet Cherokee"/>
+        <a:font script="Yiii" typeface="Microsoft Yi Baiti"/>
+        <a:font script="Tibt" typeface="Microsoft Himalaya"/>
+        <a:font script="Thaa" typeface="MV Boli"/>
+        <a:font script="Deva" typeface="Mangal"/>
+        <a:font script="Telu" typeface="Gautami"/>
+        <a:font script="Taml" typeface="Latha"/>
+        <a:font script="Syrc" typeface="Estrangelo Edessa"/>
+        <a:font script="Orya" typeface="Kalinga"/>
+        <a:font script="Mlym" typeface="Kartika"/>
+        <a:font script="Laoo" typeface="DokChampa"/>
+        <a:font script="Sinh" typeface="Iskoola Pota"/>
+        <a:font script="Mong" typeface="Mongolian Baiti"/>
+        <a:font script="Viet" typeface="Arial"/>
+        <a:font script="Uigh" typeface="Microsoft Uighur"/>
+        <a:font script="Geor" typeface="Sylfaen"/>
+      </a:minorFont>
+    </a:fontScheme>
+    <a:fmtScheme name="Office">
+      <a:fillStyleLst>
+        <a:solidFill>
+          <a:schemeClr val="phClr"/>
+        </a:solidFill>
+        <a:gradFill rotWithShape="1">
+          <a:gsLst>
+            <a:gs pos="0">
+              <a:schemeClr val="phClr">
+                <a:tint val="50000"/>
+                <a:satMod val="300000"/>
+              </a:schemeClr>
+            </a:gs>
+            <a:gs pos="35000">
+              <a:schemeClr val="phClr">
+                <a:tint val="37000"/>
+                <a:satMod val="300000"/>
+              </a:schemeClr>
+            </a:gs>
+            <a:gs pos="100000">
+              <a:schemeClr val="phClr">
+                <a:tint val="15000"/>
+                <a:satMod val="350000"/>
+              </a:schemeClr>
+            </a:gs>
+          </a:gsLst>
+          <a:lin ang="16200000" scaled="1"/>
+        </a:gradFill>
+        <a:gradFill rotWithShape="1">
+          <a:gsLst>
+            <a:gs pos="0">
+              <a:schemeClr val="phClr">
+                <a:tint val="100000"/>
+                <a:shade val="100000"/>
+                <a:satMod val="130000"/>
+              </a:schemeClr>
+            </a:gs>
+            <a:gs pos="100000">
+              <a:schemeClr val="phClr">
+                <a:tint val="50000"/>
+                <a:shade val="100000"/>
+                <a:satMod val="350000"/>
+              </a:schemeClr>
+            </a:gs>
+          </a:gsLst>
+          <a:lin ang="16200000" scaled="0"/>
+        </a:gradFill>
+      </a:fillStyleLst>
+      <a:lnStyleLst>
+        <a:ln w="9525" cap="flat" cmpd="sng" algn="ctr">
+          <a:solidFill>
+            <a:schemeClr val="phClr">
+              <a:shade val="95000"/>
+              <a:satMod val="105000"/>
+            </a:schemeClr>
+          </a:solidFill>
+          <a:prstDash val="solid"/>
+        </a:ln>
+        <a:ln w="25400" cap="flat" cmpd="sng" algn="ctr">
+          <a:solidFill>
+            <a:schemeClr val="phClr"/>
+          </a:solidFill>
+          <a:prstDash val="solid"/>
+        </a:ln>
+        <a:ln w="38100" cap="flat" cmpd="sng" algn="ctr">
+          <a:solidFill>
+            <a:schemeClr val="phClr"/>
+          </a:solidFill>
+          <a:prstDash val="solid"/>
+        </a:ln>
+      </a:lnStyleLst>
+      <a:effectStyleLst>
+        <a:effectStyle>
+          <a:effectLst>
+            <a:outerShdw blurRad="40000" dist="20000" dir="5400000" rotWithShape="0">
+              <a:srgbClr val="000000">
+                <a:alpha val="38000"/>
+              </a:srgbClr>
+            </a:outerShdw>
+          </a:effectLst>
+        </a:effectStyle>
+        <a:effectStyle>
+          <a:effectLst>
+            <a:outerShdw blurRad="40000" dist="23000" dir="5400000" rotWithShape="0">
+              <a:srgbClr val="000000">
+                <a:alpha val="35000"/>
+              </a:srgbClr>
+            </a:outerShdw>
+          </a:effectLst>
+        </a:effectStyle>
+        <a:effectStyle>
+          <a:effectLst>
+            <a:outerShdw blurRad="40000" dist="23000" dir="5400000" rotWithShape="0">
+              <a:srgbClr val="000000">
+                <a:alpha val="35000"/>
+              </a:srgbClr>
+            </a:outerShdw>
+          </a:effectLst>
+          <a:scene3d>
+            <a:camera prst="orthographicFront">
+              <a:rot lat="0" lon="0" rev="0"/>
+            </a:camera>
+            <a:lightRig rig="threePt" dir="t">
+              <a:rot lat="0" lon="0" rev="1200000"/>
+            </a:lightRig>
+          </a:scene3d>
+          <a:sp3d>
+            <a:bevelT w="63500" h="25400"/>
+          </a:sp3d>
+        </a:effectStyle>
+      </a:effectStyleLst>
+      <a:bgFillStyleLst>
+        <a:solidFill>
+          <a:schemeClr val="phClr"/>
+        </a:solidFill>
+        <a:gradFill rotWithShape="1">
+          <a:gsLst>
+            <a:gs pos="0">
+              <a:schemeClr val="phClr">
+                <a:tint val="40000"/>
+                <a:satMod val="350000"/>
+              </a:schemeClr>
+            </a:gs>
+            <a:gs pos="40000">
+              <a:schemeClr val="phClr">
+                <a:tint val="45000"/>
+                <a:shade val="99000"/>
+                <a:satMod val="350000"/>
+              </a:schemeClr>
+            </a:gs>
+            <a:gs pos="100000">
+              <a:schemeClr val="phClr">
+                <a:shade val="20000"/>
+                <a:satMod val="255000"/>
+              </a:schemeClr>
+            </a:gs>
+          </a:gsLst>
+          <a:path path="circle">
+            <a:fillToRect l="50000" t="-80000" r="50000" b="180000"/>
+          </a:path>
+        </a:gradFill>
+        <a:gradFill rotWithShape="1">
+          <a:gsLst>
+            <a:gs pos="0">
+              <a:schemeClr val="phClr">
+                <a:tint val="80000"/>
+                <a:satMod val="300000"/>
+              </a:schemeClr>
+            </a:gs>
+            <a:gs pos="100000">
+              <a:schemeClr val="phClr">
+                <a:shade val="30000"/>
+                <a:satMod val="200000"/>
+              </a:schemeClr>
+            </a:gs>
+          </a:gsLst>
+          <a:path path="circle">
+            <a:fillToRect l="50000" t="50000" r="50000" b="50000"/>
+          </a:path>
+        </a:gradFill>
+      </a:bgFillStyleLst>
+    </a:fmtScheme>
+  </a:themeElements>
+</a:theme>
+</file>
+
+<file path=ppt/theme/theme2.xml><?xml version="1.0" encoding="utf-8"?>
+<a:theme xmlns:a="http://schemas.openxmlformats.org/drawingml/2006/main" xmlns:r="http://schemas.openxmlformats.org/officeDocument/2006/relationships" name="AMOS Slides Template">
   <a:themeElements>
     <a:clrScheme name="Simple Light">
       <a:dk1>
@@ -10846,10 +14883,10 @@
 </a:theme>
 </file>
 
-<file path=ppt/theme/theme2.xml><?xml version="1.0" encoding="utf-8"?>
-<a:theme xmlns:a="http://schemas.openxmlformats.org/drawingml/2006/main" xmlns:r="http://schemas.openxmlformats.org/officeDocument/2006/relationships">
+<file path=ppt/theme/theme3.xml><?xml version="1.0" encoding="utf-8"?>
+<a:theme xmlns:a="http://schemas.openxmlformats.org/drawingml/2006/main" xmlns:r="http://schemas.openxmlformats.org/officeDocument/2006/relationships" name="POSS Slides Template">
   <a:themeElements>
-    <a:clrScheme name="Default">
+    <a:clrScheme name="Simple Light">
       <a:dk1>
         <a:srgbClr val="000000"/>
       </a:dk1>
@@ -10857,34 +14894,34 @@
         <a:srgbClr val="FFFFFF"/>
       </a:lt1>
       <a:dk2>
-        <a:srgbClr val="158158"/>
+        <a:srgbClr val="404040"/>
       </a:dk2>
       <a:lt2>
-        <a:srgbClr val="F3F3F3"/>
+        <a:srgbClr val="808080"/>
       </a:lt2>
       <a:accent1>
-        <a:srgbClr val="058DC7"/>
+        <a:srgbClr val="D0D0D0"/>
       </a:accent1>
       <a:accent2>
-        <a:srgbClr val="50B432"/>
+        <a:srgbClr val="4169E1"/>
       </a:accent2>
       <a:accent3>
-        <a:srgbClr val="ED561B"/>
+        <a:srgbClr val="4CAF50"/>
       </a:accent3>
       <a:accent4>
-        <a:srgbClr val="EDEF00"/>
+        <a:srgbClr val="FEB612"/>
       </a:accent4>
       <a:accent5>
-        <a:srgbClr val="24CBE5"/>
+        <a:srgbClr val="F36838"/>
       </a:accent5>
       <a:accent6>
-        <a:srgbClr val="64E572"/>
+        <a:srgbClr val="8E44AD"/>
       </a:accent6>
       <a:hlink>
-        <a:srgbClr val="2200CC"/>
+        <a:srgbClr val="1E90FF"/>
       </a:hlink>
       <a:folHlink>
-        <a:srgbClr val="551A8B"/>
+        <a:srgbClr val="0097A7"/>
       </a:folHlink>
     </a:clrScheme>
     <a:fontScheme name="Office">
